--- a/4/РОП/Практики_1-8/Презентации/РОП_Практическая_6_АлбахтинИВ.pptx
+++ b/4/РОП/Практики_1-8/Презентации/РОП_Практическая_6_АлбахтинИВ.pptx
@@ -2,18 +2,18 @@
 <file path=ppt/presentation.xml><?xml version="1.0" encoding="utf-8"?>
 <p:presentation xmlns:p="http://schemas.openxmlformats.org/presentationml/2006/main">
   <p:sldMasterIdLst>
-    <p:sldMasterId xmlns:r="http://schemas.openxmlformats.org/officeDocument/2006/relationships" id="2147483648" r:id="Rc9289b04eb024a68"/>
+    <p:sldMasterId xmlns:r="http://schemas.openxmlformats.org/officeDocument/2006/relationships" id="2147483648" r:id="Rbfcf73d3e6af49ab"/>
   </p:sldMasterIdLst>
   <p:notesMasterIdLst>
-    <p:notesMasterId xmlns:r="http://schemas.openxmlformats.org/officeDocument/2006/relationships" r:id="R3352947e98ee4ed1"/>
+    <p:notesMasterId xmlns:r="http://schemas.openxmlformats.org/officeDocument/2006/relationships" r:id="Rdb0c2c1b682e4ae1"/>
   </p:notesMasterIdLst>
   <p:sldIdLst>
-    <p:sldId xmlns:r="http://schemas.openxmlformats.org/officeDocument/2006/relationships" id="256" r:id="R2f6befb6c72a41d5"/>
-    <p:sldId xmlns:r="http://schemas.openxmlformats.org/officeDocument/2006/relationships" id="257" r:id="R69711a8721ad42d6"/>
-    <p:sldId xmlns:r="http://schemas.openxmlformats.org/officeDocument/2006/relationships" id="258" r:id="Re4d5066002704a77"/>
-    <p:sldId xmlns:r="http://schemas.openxmlformats.org/officeDocument/2006/relationships" id="259" r:id="R1c159a7268f84f37"/>
-    <p:sldId xmlns:r="http://schemas.openxmlformats.org/officeDocument/2006/relationships" id="260" r:id="R705bb1db9e0140bf"/>
-    <p:sldId xmlns:r="http://schemas.openxmlformats.org/officeDocument/2006/relationships" id="261" r:id="R0887d801402a4cb9"/>
+    <p:sldId xmlns:r="http://schemas.openxmlformats.org/officeDocument/2006/relationships" id="256" r:id="R0ba546e1e2b741bc"/>
+    <p:sldId xmlns:r="http://schemas.openxmlformats.org/officeDocument/2006/relationships" id="257" r:id="R50531e4f6a834f37"/>
+    <p:sldId xmlns:r="http://schemas.openxmlformats.org/officeDocument/2006/relationships" id="258" r:id="R5791b59994f94704"/>
+    <p:sldId xmlns:r="http://schemas.openxmlformats.org/officeDocument/2006/relationships" id="259" r:id="R484d93ddf59e4596"/>
+    <p:sldId xmlns:r="http://schemas.openxmlformats.org/officeDocument/2006/relationships" id="260" r:id="R3f1af864e9ad4e7c"/>
+    <p:sldId xmlns:r="http://schemas.openxmlformats.org/officeDocument/2006/relationships" id="261" r:id="Re30e703c32754dd5"/>
   </p:sldIdLst>
   <p:sldSz cx="12192000" cy="6858000"/>
   <p:notesSz cx="6858000" cy="9144000"/>
@@ -895,7 +895,7 @@
   </p:cSld>
   <p:clrMap bg1="lt1" tx1="dk1" bg2="lt2" tx2="dk2" accent1="accent1" accent2="accent2" accent3="accent3" accent4="accent4" accent5="accent5" accent6="accent6" hlink="hlink" folHlink="folHlink"/>
   <p:sldLayoutIdLst>
-    <p:sldLayoutId xmlns:r="http://schemas.openxmlformats.org/officeDocument/2006/relationships" id="2147483649" r:id="Re8813e8249534621"/>
+    <p:sldLayoutId xmlns:r="http://schemas.openxmlformats.org/officeDocument/2006/relationships" id="2147483649" r:id="Ra34f6337fec44833"/>
   </p:sldLayoutIdLst>
   <p:txStyles>
     <p:titleStyle>
@@ -1446,7 +1446,7 @@
           <p:cNvPr id="5" name="">
             <a:extLst xmlns:a="http://schemas.openxmlformats.org/drawingml/2006/main">
               <a:ext uri="{FF2B5EF4-FFF2-40B4-BE49-F238E27FC236}">
-                <a16:creationId xmlns:a16="http://schemas.microsoft.com/office/drawing/2014/main" id="{DFA457B6-7745-48AE-95FA-80C82B5AD8EF}"/>
+                <a16:creationId xmlns:a16="http://schemas.microsoft.com/office/drawing/2014/main" id="{724F0B40-3538-4ECC-8125-4C206FC036C3}"/>
               </a:ext>
             </a:extLst>
           </p:cNvPr>
@@ -1457,8 +1457,8 @@
         </p:nvSpPr>
         <p:spPr>
           <a:xfrm xmlns:a="http://schemas.openxmlformats.org/drawingml/2006/main">
-            <a:off x="552450" y="333375"/>
-            <a:ext cx="11049000" cy="857250"/>
+            <a:off x="552450" y="266700"/>
+            <a:ext cx="11049000" cy="742950"/>
           </a:xfrm>
           <a:prstGeom xmlns:a="http://schemas.openxmlformats.org/drawingml/2006/main" prst="rect">
             <a:avLst/>
@@ -1469,13 +1469,13 @@
           </a:ln>
         </p:spPr>
         <p:txBody>
-          <a:bodyPr xmlns:a="http://schemas.openxmlformats.org/drawingml/2006/main">
+          <a:bodyPr xmlns:a="http://schemas.openxmlformats.org/drawingml/2006/main" anchor="ctr">
             <a:noAutofit/>
           </a:bodyPr>
           <a:lstStyle xmlns:a="http://schemas.openxmlformats.org/drawingml/2006/main"/>
           <a:p xmlns:a="http://schemas.openxmlformats.org/drawingml/2006/main">
-            <a:pPr>
-              <a:defRPr sz="3150" b="1">
+            <a:pPr algn="l">
+              <a:defRPr sz="2700" b="1">
                 <a:solidFill>
                   <a:srgbClr val="161616"/>
                 </a:solidFill>
@@ -1485,7 +1485,7 @@
               </a:defRPr>
             </a:pPr>
             <a:r>
-              <a:rPr sz="3150" b="1">
+              <a:rPr sz="2700" b="1">
                 <a:solidFill>
                   <a:srgbClr val="161616"/>
                 </a:solidFill>
@@ -1503,7 +1503,7 @@
           <p:cNvPr id="2" name="">
             <a:extLst xmlns:a="http://schemas.openxmlformats.org/drawingml/2006/main">
               <a:ext uri="{FF2B5EF4-FFF2-40B4-BE49-F238E27FC236}">
-                <a16:creationId xmlns:a16="http://schemas.microsoft.com/office/drawing/2014/main" id="{CFE6C4BD-D26C-4845-876E-48B8D126E4B4}"/>
+                <a16:creationId xmlns:a16="http://schemas.microsoft.com/office/drawing/2014/main" id="{BC32D819-3F49-49CE-9E67-5CD54475EE81}"/>
               </a:ext>
             </a:extLst>
           </p:cNvPr>
@@ -1560,7 +1560,7 @@
           <p:cNvPr id="3" name="">
             <a:extLst xmlns:a="http://schemas.openxmlformats.org/drawingml/2006/main">
               <a:ext uri="{FF2B5EF4-FFF2-40B4-BE49-F238E27FC236}">
-                <a16:creationId xmlns:a16="http://schemas.microsoft.com/office/drawing/2014/main" id="{80E6CD46-4FD3-44AC-A7A0-D22195BDB1BF}"/>
+                <a16:creationId xmlns:a16="http://schemas.microsoft.com/office/drawing/2014/main" id="{67D0C964-39D0-4942-A333-87DD2D6CDBE4}"/>
               </a:ext>
             </a:extLst>
           </p:cNvPr>
@@ -1617,7 +1617,7 @@
           <p:cNvPr id="4" name="">
             <a:extLst xmlns:a="http://schemas.openxmlformats.org/drawingml/2006/main">
               <a:ext uri="{FF2B5EF4-FFF2-40B4-BE49-F238E27FC236}">
-                <a16:creationId xmlns:a16="http://schemas.microsoft.com/office/drawing/2014/main" id="{48C7620C-AA71-4B8D-BA24-4F69B2FE63B9}"/>
+                <a16:creationId xmlns:a16="http://schemas.microsoft.com/office/drawing/2014/main" id="{E168A325-9184-4C73-B378-F870F0A4776F}"/>
               </a:ext>
             </a:extLst>
           </p:cNvPr>
@@ -1695,7 +1695,7 @@
     </p:spTree>
     <p:extLst>
       <p:ext uri="{BB962C8B-B14F-4D97-AF65-F5344CB8AC3E}">
-        <p14:creationId xmlns:p14="http://schemas.microsoft.com/office/powerpoint/2010/main" val="1242110441"/>
+        <p14:creationId xmlns:p14="http://schemas.microsoft.com/office/powerpoint/2010/main" val="954362305"/>
       </p:ext>
     </p:extLst>
   </p:cSld>
@@ -1726,7 +1726,7 @@
           <p:cNvPr id="3" name="">
             <a:extLst xmlns:a="http://schemas.openxmlformats.org/drawingml/2006/main">
               <a:ext uri="{FF2B5EF4-FFF2-40B4-BE49-F238E27FC236}">
-                <a16:creationId xmlns:a16="http://schemas.microsoft.com/office/drawing/2014/main" id="{B5E6AD4A-2A4A-4A84-8804-3F938D29A9DB}"/>
+                <a16:creationId xmlns:a16="http://schemas.microsoft.com/office/drawing/2014/main" id="{58EAE1F3-6C87-4A9A-B83C-7393EA56CB26}"/>
               </a:ext>
             </a:extLst>
           </p:cNvPr>
@@ -1737,8 +1737,8 @@
         </p:nvSpPr>
         <p:spPr>
           <a:xfrm xmlns:a="http://schemas.openxmlformats.org/drawingml/2006/main">
-            <a:off x="552450" y="333375"/>
-            <a:ext cx="11049000" cy="857250"/>
+            <a:off x="552450" y="266700"/>
+            <a:ext cx="11049000" cy="742950"/>
           </a:xfrm>
           <a:prstGeom xmlns:a="http://schemas.openxmlformats.org/drawingml/2006/main" prst="rect">
             <a:avLst/>
@@ -1749,13 +1749,13 @@
           </a:ln>
         </p:spPr>
         <p:txBody>
-          <a:bodyPr xmlns:a="http://schemas.openxmlformats.org/drawingml/2006/main">
+          <a:bodyPr xmlns:a="http://schemas.openxmlformats.org/drawingml/2006/main" anchor="ctr">
             <a:noAutofit/>
           </a:bodyPr>
           <a:lstStyle xmlns:a="http://schemas.openxmlformats.org/drawingml/2006/main"/>
           <a:p xmlns:a="http://schemas.openxmlformats.org/drawingml/2006/main">
-            <a:pPr>
-              <a:defRPr sz="3150" b="1">
+            <a:pPr algn="l">
+              <a:defRPr sz="2700" b="1">
                 <a:solidFill>
                   <a:srgbClr val="161616"/>
                 </a:solidFill>
@@ -1765,7 +1765,7 @@
               </a:defRPr>
             </a:pPr>
             <a:r>
-              <a:rPr sz="3150" b="1">
+              <a:rPr sz="2700" b="1">
                 <a:solidFill>
                   <a:srgbClr val="161616"/>
                 </a:solidFill>
@@ -1787,13 +1787,13 @@
           <p:nvPr/>
         </p:nvPicPr>
         <p:blipFill>
-          <a:blip xmlns:r="http://schemas.openxmlformats.org/officeDocument/2006/relationships" xmlns:a="http://schemas.openxmlformats.org/drawingml/2006/main" r:embed="Rf8ee6bc0c5014043"/>
+          <a:blip xmlns:r="http://schemas.openxmlformats.org/officeDocument/2006/relationships" xmlns:a="http://schemas.openxmlformats.org/drawingml/2006/main" r:embed="R4a65d5ca2db04524"/>
           <a:stretch xmlns:a="http://schemas.openxmlformats.org/drawingml/2006/main"/>
         </p:blipFill>
         <p:spPr>
           <a:xfrm xmlns:a="http://schemas.openxmlformats.org/drawingml/2006/main">
-            <a:off x="2307648" y="1285875"/>
-            <a:ext cx="7576705" cy="5000625"/>
+            <a:off x="2527766" y="1285875"/>
+            <a:ext cx="7136468" cy="5000625"/>
           </a:xfrm>
           <a:prstGeom xmlns:a="http://schemas.openxmlformats.org/drawingml/2006/main" prst="rect">
             <a:avLst/>
@@ -1803,7 +1803,7 @@
     </p:spTree>
     <p:extLst>
       <p:ext uri="{BB962C8B-B14F-4D97-AF65-F5344CB8AC3E}">
-        <p14:creationId xmlns:p14="http://schemas.microsoft.com/office/powerpoint/2010/main" val="2146531886"/>
+        <p14:creationId xmlns:p14="http://schemas.microsoft.com/office/powerpoint/2010/main" val="1776792759"/>
       </p:ext>
     </p:extLst>
   </p:cSld>
@@ -1834,7 +1834,7 @@
           <p:cNvPr id="3" name="">
             <a:extLst xmlns:a="http://schemas.openxmlformats.org/drawingml/2006/main">
               <a:ext uri="{FF2B5EF4-FFF2-40B4-BE49-F238E27FC236}">
-                <a16:creationId xmlns:a16="http://schemas.microsoft.com/office/drawing/2014/main" id="{26E731E4-CF1E-49F8-9635-81E2E679C2F3}"/>
+                <a16:creationId xmlns:a16="http://schemas.microsoft.com/office/drawing/2014/main" id="{EDDE5C77-F7D0-4ED4-84F0-23966DC3FCF8}"/>
               </a:ext>
             </a:extLst>
           </p:cNvPr>
@@ -1845,8 +1845,8 @@
         </p:nvSpPr>
         <p:spPr>
           <a:xfrm xmlns:a="http://schemas.openxmlformats.org/drawingml/2006/main">
-            <a:off x="552450" y="333375"/>
-            <a:ext cx="11049000" cy="857250"/>
+            <a:off x="552450" y="266700"/>
+            <a:ext cx="11049000" cy="742950"/>
           </a:xfrm>
           <a:prstGeom xmlns:a="http://schemas.openxmlformats.org/drawingml/2006/main" prst="rect">
             <a:avLst/>
@@ -1857,13 +1857,13 @@
           </a:ln>
         </p:spPr>
         <p:txBody>
-          <a:bodyPr xmlns:a="http://schemas.openxmlformats.org/drawingml/2006/main">
+          <a:bodyPr xmlns:a="http://schemas.openxmlformats.org/drawingml/2006/main" anchor="ctr">
             <a:noAutofit/>
           </a:bodyPr>
           <a:lstStyle xmlns:a="http://schemas.openxmlformats.org/drawingml/2006/main"/>
           <a:p xmlns:a="http://schemas.openxmlformats.org/drawingml/2006/main">
-            <a:pPr>
-              <a:defRPr sz="3150" b="1">
+            <a:pPr algn="l">
+              <a:defRPr sz="2700" b="1">
                 <a:solidFill>
                   <a:srgbClr val="161616"/>
                 </a:solidFill>
@@ -1873,7 +1873,7 @@
               </a:defRPr>
             </a:pPr>
             <a:r>
-              <a:rPr sz="3150" b="1">
+              <a:rPr sz="2700" b="1">
                 <a:solidFill>
                   <a:srgbClr val="161616"/>
                 </a:solidFill>
@@ -2211,7 +2211,7 @@
     </p:spTree>
     <p:extLst>
       <p:ext uri="{BB962C8B-B14F-4D97-AF65-F5344CB8AC3E}">
-        <p14:creationId xmlns:p14="http://schemas.microsoft.com/office/powerpoint/2010/main" val="1495649753"/>
+        <p14:creationId xmlns:p14="http://schemas.microsoft.com/office/powerpoint/2010/main" val="188394932"/>
       </p:ext>
     </p:extLst>
   </p:cSld>
@@ -2242,7 +2242,7 @@
           <p:cNvPr id="3" name="">
             <a:extLst xmlns:a="http://schemas.openxmlformats.org/drawingml/2006/main">
               <a:ext uri="{FF2B5EF4-FFF2-40B4-BE49-F238E27FC236}">
-                <a16:creationId xmlns:a16="http://schemas.microsoft.com/office/drawing/2014/main" id="{61A1F4AD-273B-448D-9356-39E8B68A898B}"/>
+                <a16:creationId xmlns:a16="http://schemas.microsoft.com/office/drawing/2014/main" id="{03CB31A1-3002-4245-AB20-AC2E7275F195}"/>
               </a:ext>
             </a:extLst>
           </p:cNvPr>
@@ -2253,8 +2253,8 @@
         </p:nvSpPr>
         <p:spPr>
           <a:xfrm xmlns:a="http://schemas.openxmlformats.org/drawingml/2006/main">
-            <a:off x="552450" y="333375"/>
-            <a:ext cx="11049000" cy="857250"/>
+            <a:off x="552450" y="266700"/>
+            <a:ext cx="11049000" cy="742950"/>
           </a:xfrm>
           <a:prstGeom xmlns:a="http://schemas.openxmlformats.org/drawingml/2006/main" prst="rect">
             <a:avLst/>
@@ -2265,13 +2265,13 @@
           </a:ln>
         </p:spPr>
         <p:txBody>
-          <a:bodyPr xmlns:a="http://schemas.openxmlformats.org/drawingml/2006/main">
+          <a:bodyPr xmlns:a="http://schemas.openxmlformats.org/drawingml/2006/main" anchor="ctr">
             <a:noAutofit/>
           </a:bodyPr>
           <a:lstStyle xmlns:a="http://schemas.openxmlformats.org/drawingml/2006/main"/>
           <a:p xmlns:a="http://schemas.openxmlformats.org/drawingml/2006/main">
-            <a:pPr>
-              <a:defRPr sz="3150" b="1">
+            <a:pPr algn="l">
+              <a:defRPr sz="2700" b="1">
                 <a:solidFill>
                   <a:srgbClr val="161616"/>
                 </a:solidFill>
@@ -2281,7 +2281,7 @@
               </a:defRPr>
             </a:pPr>
             <a:r>
-              <a:rPr sz="3150" b="1">
+              <a:rPr sz="2700" b="1">
                 <a:solidFill>
                   <a:srgbClr val="161616"/>
                 </a:solidFill>
@@ -2837,7 +2837,7 @@
     </p:spTree>
     <p:extLst>
       <p:ext uri="{BB962C8B-B14F-4D97-AF65-F5344CB8AC3E}">
-        <p14:creationId xmlns:p14="http://schemas.microsoft.com/office/powerpoint/2010/main" val="1812933780"/>
+        <p14:creationId xmlns:p14="http://schemas.microsoft.com/office/powerpoint/2010/main" val="2003403562"/>
       </p:ext>
     </p:extLst>
   </p:cSld>
@@ -2868,7 +2868,7 @@
           <p:cNvPr id="3" name="">
             <a:extLst xmlns:a="http://schemas.openxmlformats.org/drawingml/2006/main">
               <a:ext uri="{FF2B5EF4-FFF2-40B4-BE49-F238E27FC236}">
-                <a16:creationId xmlns:a16="http://schemas.microsoft.com/office/drawing/2014/main" id="{4222BF19-1DAC-417E-8E33-C53500EE3B4B}"/>
+                <a16:creationId xmlns:a16="http://schemas.microsoft.com/office/drawing/2014/main" id="{D9664903-14B3-4774-BD12-E96EA1A94B0E}"/>
               </a:ext>
             </a:extLst>
           </p:cNvPr>
@@ -2879,8 +2879,8 @@
         </p:nvSpPr>
         <p:spPr>
           <a:xfrm xmlns:a="http://schemas.openxmlformats.org/drawingml/2006/main">
-            <a:off x="552450" y="333375"/>
-            <a:ext cx="11049000" cy="857250"/>
+            <a:off x="552450" y="266700"/>
+            <a:ext cx="11049000" cy="742950"/>
           </a:xfrm>
           <a:prstGeom xmlns:a="http://schemas.openxmlformats.org/drawingml/2006/main" prst="rect">
             <a:avLst/>
@@ -2891,13 +2891,13 @@
           </a:ln>
         </p:spPr>
         <p:txBody>
-          <a:bodyPr xmlns:a="http://schemas.openxmlformats.org/drawingml/2006/main">
+          <a:bodyPr xmlns:a="http://schemas.openxmlformats.org/drawingml/2006/main" anchor="ctr">
             <a:noAutofit/>
           </a:bodyPr>
           <a:lstStyle xmlns:a="http://schemas.openxmlformats.org/drawingml/2006/main"/>
           <a:p xmlns:a="http://schemas.openxmlformats.org/drawingml/2006/main">
-            <a:pPr>
-              <a:defRPr sz="3150" b="1">
+            <a:pPr algn="l">
+              <a:defRPr sz="2700" b="1">
                 <a:solidFill>
                   <a:srgbClr val="161616"/>
                 </a:solidFill>
@@ -2907,7 +2907,7 @@
               </a:defRPr>
             </a:pPr>
             <a:r>
-              <a:rPr sz="3150" b="1">
+              <a:rPr sz="2700" b="1">
                 <a:solidFill>
                   <a:srgbClr val="161616"/>
                 </a:solidFill>
@@ -3242,7 +3242,7 @@
     </p:spTree>
     <p:extLst>
       <p:ext uri="{BB962C8B-B14F-4D97-AF65-F5344CB8AC3E}">
-        <p14:creationId xmlns:p14="http://schemas.microsoft.com/office/powerpoint/2010/main" val="583070255"/>
+        <p14:creationId xmlns:p14="http://schemas.microsoft.com/office/powerpoint/2010/main" val="2093906176"/>
       </p:ext>
     </p:extLst>
   </p:cSld>
@@ -3273,7 +3273,7 @@
           <p:cNvPr id="6" name="">
             <a:extLst xmlns:a="http://schemas.openxmlformats.org/drawingml/2006/main">
               <a:ext uri="{FF2B5EF4-FFF2-40B4-BE49-F238E27FC236}">
-                <a16:creationId xmlns:a16="http://schemas.microsoft.com/office/drawing/2014/main" id="{BC6705A0-293A-42F2-9884-33D075621333}"/>
+                <a16:creationId xmlns:a16="http://schemas.microsoft.com/office/drawing/2014/main" id="{43B5CF81-F8CA-416D-9C41-5306181BC2FD}"/>
               </a:ext>
             </a:extLst>
           </p:cNvPr>
@@ -3284,8 +3284,8 @@
         </p:nvSpPr>
         <p:spPr>
           <a:xfrm xmlns:a="http://schemas.openxmlformats.org/drawingml/2006/main">
-            <a:off x="552450" y="333375"/>
-            <a:ext cx="11049000" cy="857250"/>
+            <a:off x="552450" y="266700"/>
+            <a:ext cx="11049000" cy="742950"/>
           </a:xfrm>
           <a:prstGeom xmlns:a="http://schemas.openxmlformats.org/drawingml/2006/main" prst="rect">
             <a:avLst/>
@@ -3296,13 +3296,13 @@
           </a:ln>
         </p:spPr>
         <p:txBody>
-          <a:bodyPr xmlns:a="http://schemas.openxmlformats.org/drawingml/2006/main">
+          <a:bodyPr xmlns:a="http://schemas.openxmlformats.org/drawingml/2006/main" anchor="ctr">
             <a:noAutofit/>
           </a:bodyPr>
           <a:lstStyle xmlns:a="http://schemas.openxmlformats.org/drawingml/2006/main"/>
           <a:p xmlns:a="http://schemas.openxmlformats.org/drawingml/2006/main">
-            <a:pPr>
-              <a:defRPr sz="3150" b="1">
+            <a:pPr algn="l">
+              <a:defRPr sz="2700" b="1">
                 <a:solidFill>
                   <a:srgbClr val="161616"/>
                 </a:solidFill>
@@ -3312,7 +3312,7 @@
               </a:defRPr>
             </a:pPr>
             <a:r>
-              <a:rPr sz="3150" b="1">
+              <a:rPr sz="2700" b="1">
                 <a:solidFill>
                   <a:srgbClr val="161616"/>
                 </a:solidFill>
@@ -3330,7 +3330,7 @@
           <p:cNvPr id="2" name="">
             <a:extLst xmlns:a="http://schemas.openxmlformats.org/drawingml/2006/main">
               <a:ext uri="{FF2B5EF4-FFF2-40B4-BE49-F238E27FC236}">
-                <a16:creationId xmlns:a16="http://schemas.microsoft.com/office/drawing/2014/main" id="{E6803D07-A138-46BC-83AC-ED07D5F60F8B}"/>
+                <a16:creationId xmlns:a16="http://schemas.microsoft.com/office/drawing/2014/main" id="{2EA6CAA2-D9B2-45D8-B83B-924786C62DAB}"/>
               </a:ext>
             </a:extLst>
           </p:cNvPr>
@@ -3387,7 +3387,7 @@
           <p:cNvPr id="3" name="">
             <a:extLst xmlns:a="http://schemas.openxmlformats.org/drawingml/2006/main">
               <a:ext uri="{FF2B5EF4-FFF2-40B4-BE49-F238E27FC236}">
-                <a16:creationId xmlns:a16="http://schemas.microsoft.com/office/drawing/2014/main" id="{EFB04C66-7639-479A-8FF7-1EF0B1FB189E}"/>
+                <a16:creationId xmlns:a16="http://schemas.microsoft.com/office/drawing/2014/main" id="{9775E3FD-EF2C-4126-AA7B-6CD6FB67966E}"/>
               </a:ext>
             </a:extLst>
           </p:cNvPr>
@@ -3444,7 +3444,7 @@
           <p:cNvPr id="4" name="">
             <a:extLst xmlns:a="http://schemas.openxmlformats.org/drawingml/2006/main">
               <a:ext uri="{FF2B5EF4-FFF2-40B4-BE49-F238E27FC236}">
-                <a16:creationId xmlns:a16="http://schemas.microsoft.com/office/drawing/2014/main" id="{28F0BF31-2211-4ED7-BAAC-AFC87D4A0562}"/>
+                <a16:creationId xmlns:a16="http://schemas.microsoft.com/office/drawing/2014/main" id="{0C8320EC-15BD-421D-9D95-9B3EC917B5E5}"/>
               </a:ext>
             </a:extLst>
           </p:cNvPr>
@@ -3501,7 +3501,7 @@
           <p:cNvPr id="5" name="">
             <a:extLst xmlns:a="http://schemas.openxmlformats.org/drawingml/2006/main">
               <a:ext uri="{FF2B5EF4-FFF2-40B4-BE49-F238E27FC236}">
-                <a16:creationId xmlns:a16="http://schemas.microsoft.com/office/drawing/2014/main" id="{A6911FD2-5DED-4085-BEED-7D9E256A9210}"/>
+                <a16:creationId xmlns:a16="http://schemas.microsoft.com/office/drawing/2014/main" id="{02669FF7-0F7D-484D-A310-53E8A342120D}"/>
               </a:ext>
             </a:extLst>
           </p:cNvPr>
@@ -3556,7 +3556,7 @@
     </p:spTree>
     <p:extLst>
       <p:ext uri="{BB962C8B-B14F-4D97-AF65-F5344CB8AC3E}">
-        <p14:creationId xmlns:p14="http://schemas.microsoft.com/office/powerpoint/2010/main" val="1511945000"/>
+        <p14:creationId xmlns:p14="http://schemas.microsoft.com/office/powerpoint/2010/main" val="1270803327"/>
       </p:ext>
     </p:extLst>
   </p:cSld>

--- a/4/РОП/Практики_1-8/Презентации/РОП_Практическая_6_АлбахтинИВ.pptx
+++ b/4/РОП/Практики_1-8/Презентации/РОП_Практическая_6_АлбахтинИВ.pptx
@@ -2,18 +2,18 @@
 <file path=ppt/presentation.xml><?xml version="1.0" encoding="utf-8"?>
 <p:presentation xmlns:p="http://schemas.openxmlformats.org/presentationml/2006/main">
   <p:sldMasterIdLst>
-    <p:sldMasterId xmlns:r="http://schemas.openxmlformats.org/officeDocument/2006/relationships" id="2147483648" r:id="Rbfcf73d3e6af49ab"/>
+    <p:sldMasterId xmlns:r="http://schemas.openxmlformats.org/officeDocument/2006/relationships" id="2147483648" r:id="Rdfd7db577bd04d88"/>
   </p:sldMasterIdLst>
   <p:notesMasterIdLst>
-    <p:notesMasterId xmlns:r="http://schemas.openxmlformats.org/officeDocument/2006/relationships" r:id="Rdb0c2c1b682e4ae1"/>
+    <p:notesMasterId xmlns:r="http://schemas.openxmlformats.org/officeDocument/2006/relationships" r:id="R421538042de04c8c"/>
   </p:notesMasterIdLst>
   <p:sldIdLst>
-    <p:sldId xmlns:r="http://schemas.openxmlformats.org/officeDocument/2006/relationships" id="256" r:id="R0ba546e1e2b741bc"/>
-    <p:sldId xmlns:r="http://schemas.openxmlformats.org/officeDocument/2006/relationships" id="257" r:id="R50531e4f6a834f37"/>
-    <p:sldId xmlns:r="http://schemas.openxmlformats.org/officeDocument/2006/relationships" id="258" r:id="R5791b59994f94704"/>
-    <p:sldId xmlns:r="http://schemas.openxmlformats.org/officeDocument/2006/relationships" id="259" r:id="R484d93ddf59e4596"/>
-    <p:sldId xmlns:r="http://schemas.openxmlformats.org/officeDocument/2006/relationships" id="260" r:id="R3f1af864e9ad4e7c"/>
-    <p:sldId xmlns:r="http://schemas.openxmlformats.org/officeDocument/2006/relationships" id="261" r:id="Re30e703c32754dd5"/>
+    <p:sldId xmlns:r="http://schemas.openxmlformats.org/officeDocument/2006/relationships" id="256" r:id="R0bbe7f186e6a45c9"/>
+    <p:sldId xmlns:r="http://schemas.openxmlformats.org/officeDocument/2006/relationships" id="257" r:id="Re3470a3b2133467e"/>
+    <p:sldId xmlns:r="http://schemas.openxmlformats.org/officeDocument/2006/relationships" id="258" r:id="R4c97c067007b4701"/>
+    <p:sldId xmlns:r="http://schemas.openxmlformats.org/officeDocument/2006/relationships" id="259" r:id="R7c18e57d222e4fdf"/>
+    <p:sldId xmlns:r="http://schemas.openxmlformats.org/officeDocument/2006/relationships" id="260" r:id="Rbdfcbf5329714fd8"/>
+    <p:sldId xmlns:r="http://schemas.openxmlformats.org/officeDocument/2006/relationships" id="261" r:id="R43844aa97dfe4f84"/>
   </p:sldIdLst>
   <p:sldSz cx="12192000" cy="6858000"/>
   <p:notesSz cx="6858000" cy="9144000"/>
@@ -203,16 +203,16 @@
         <a:srgbClr val="96607D"/>
       </a:folHlink>
     </a:clrScheme>
-    <a:fontScheme name="Office">
+    <a:fontScheme name="">
       <a:majorFont>
-        <a:latin typeface="Calibri Light"/>
-        <a:ea typeface="Calibri Light"/>
-        <a:cs typeface="Calibri Light"/>
+        <a:latin typeface="Aptos"/>
+        <a:ea typeface=""/>
+        <a:cs typeface=""/>
       </a:majorFont>
       <a:minorFont>
-        <a:latin typeface="Calibri"/>
-        <a:ea typeface="Calibri"/>
-        <a:cs typeface="Calibri"/>
+        <a:latin typeface="Aptos"/>
+        <a:ea typeface=""/>
+        <a:cs typeface=""/>
       </a:minorFont>
     </a:fontScheme>
     <a:fmtScheme name="ChatGPT">
@@ -869,6 +869,1661 @@
       <p:grpSpPr>
         <a:xfrm xmlns:a="http://schemas.openxmlformats.org/drawingml/2006/main"/>
       </p:grpSpPr>
+      <p:sp>
+        <p:nvSpPr>
+          <p:cNvPr id="3" name="Title">
+            <a:extLst xmlns:a="http://schemas.openxmlformats.org/drawingml/2006/main">
+              <a:ext uri="{FF2B5EF4-FFF2-40B4-BE49-F238E27FC236}">
+                <a16:creationId xmlns:a16="http://schemas.microsoft.com/office/drawing/2014/main" id="{DF1F699F-B78B-446B-A2C4-DA57D1A8D71D}"/>
+              </a:ext>
+            </a:extLst>
+          </p:cNvPr>
+          <p:cNvSpPr>
+            <a:spLocks xmlns:a="http://schemas.openxmlformats.org/drawingml/2006/main" noGrp="1"/>
+          </p:cNvSpPr>
+          <p:nvPr>
+            <p:ph type="title" idx="0"/>
+          </p:nvPr>
+        </p:nvSpPr>
+        <p:spPr>
+          <a:xfrm xmlns:a="http://schemas.openxmlformats.org/drawingml/2006/main">
+            <a:off x="1219200" y="2590800"/>
+            <a:ext cx="9753600" cy="990600"/>
+          </a:xfrm>
+          <a:prstGeom xmlns:a="http://schemas.openxmlformats.org/drawingml/2006/main" prst="rect">
+            <a:avLst/>
+          </a:prstGeom>
+          <a:noFill xmlns:a="http://schemas.openxmlformats.org/drawingml/2006/main"/>
+          <a:ln xmlns:a="http://schemas.openxmlformats.org/drawingml/2006/main">
+            <a:noFill/>
+            <a:prstDash val="solid"/>
+          </a:ln>
+        </p:spPr>
+        <p:txBody>
+          <a:bodyPr xmlns:a="http://schemas.openxmlformats.org/drawingml/2006/main" wrap="square" lIns="0" tIns="0" rIns="0" bIns="0" anchor="ctr">
+            <a:normAutofit/>
+          </a:bodyPr>
+          <a:lstStyle xmlns:a="http://schemas.openxmlformats.org/drawingml/2006/main">
+            <a:defPPr algn="ctr">
+              <a:defRPr sz="4800" b="1">
+                <a:solidFill>
+                  <a:schemeClr val="tx1"/>
+                </a:solidFill>
+                <a:latin typeface="+mj-lt"/>
+                <a:ea typeface="+mj-lt"/>
+                <a:cs typeface="+mj-lt"/>
+              </a:defRPr>
+            </a:defPPr>
+            <a:lvl1pPr marL="0" indent="0">
+              <a:lnSpc>
+                <a:spcPct val="110000"/>
+              </a:lnSpc>
+              <a:spcBef>
+                <a:spcPts val="0"/>
+              </a:spcBef>
+              <a:spcAft>
+                <a:spcPts val="0"/>
+              </a:spcAft>
+              <a:buNone/>
+            </a:lvl1pPr>
+            <a:lvl2pPr marL="0" indent="0">
+              <a:lnSpc>
+                <a:spcPct val="110000"/>
+              </a:lnSpc>
+              <a:spcBef>
+                <a:spcPts val="0"/>
+              </a:spcBef>
+              <a:spcAft>
+                <a:spcPts val="0"/>
+              </a:spcAft>
+              <a:buNone/>
+            </a:lvl2pPr>
+            <a:lvl3pPr marL="0" indent="0">
+              <a:lnSpc>
+                <a:spcPct val="110000"/>
+              </a:lnSpc>
+              <a:spcBef>
+                <a:spcPts val="0"/>
+              </a:spcBef>
+              <a:spcAft>
+                <a:spcPts val="0"/>
+              </a:spcAft>
+              <a:buNone/>
+            </a:lvl3pPr>
+            <a:lvl4pPr marL="0" indent="0">
+              <a:lnSpc>
+                <a:spcPct val="110000"/>
+              </a:lnSpc>
+              <a:spcBef>
+                <a:spcPts val="0"/>
+              </a:spcBef>
+              <a:spcAft>
+                <a:spcPts val="0"/>
+              </a:spcAft>
+              <a:buNone/>
+            </a:lvl4pPr>
+            <a:lvl5pPr marL="0" indent="0">
+              <a:lnSpc>
+                <a:spcPct val="110000"/>
+              </a:lnSpc>
+              <a:spcBef>
+                <a:spcPts val="0"/>
+              </a:spcBef>
+              <a:spcAft>
+                <a:spcPts val="0"/>
+              </a:spcAft>
+              <a:buNone/>
+            </a:lvl5pPr>
+            <a:lvl6pPr marL="0" indent="0">
+              <a:lnSpc>
+                <a:spcPct val="110000"/>
+              </a:lnSpc>
+              <a:spcBef>
+                <a:spcPts val="0"/>
+              </a:spcBef>
+              <a:spcAft>
+                <a:spcPts val="0"/>
+              </a:spcAft>
+              <a:buNone/>
+            </a:lvl6pPr>
+            <a:lvl7pPr marL="0" indent="0">
+              <a:lnSpc>
+                <a:spcPct val="110000"/>
+              </a:lnSpc>
+              <a:spcBef>
+                <a:spcPts val="0"/>
+              </a:spcBef>
+              <a:spcAft>
+                <a:spcPts val="0"/>
+              </a:spcAft>
+              <a:buNone/>
+            </a:lvl7pPr>
+            <a:lvl8pPr marL="0" indent="0">
+              <a:lnSpc>
+                <a:spcPct val="110000"/>
+              </a:lnSpc>
+              <a:spcBef>
+                <a:spcPts val="0"/>
+              </a:spcBef>
+              <a:spcAft>
+                <a:spcPts val="0"/>
+              </a:spcAft>
+              <a:buNone/>
+            </a:lvl8pPr>
+            <a:lvl9pPr marL="0" indent="0">
+              <a:lnSpc>
+                <a:spcPct val="110000"/>
+              </a:lnSpc>
+              <a:spcBef>
+                <a:spcPts val="0"/>
+              </a:spcBef>
+              <a:spcAft>
+                <a:spcPts val="0"/>
+              </a:spcAft>
+              <a:buNone/>
+            </a:lvl9pPr>
+          </a:lstStyle>
+          <a:p xmlns:a="http://schemas.openxmlformats.org/drawingml/2006/main"/>
+        </p:txBody>
+      </p:sp>
+      <p:sp>
+        <p:nvSpPr>
+          <p:cNvPr id="2" name="Subtitle">
+            <a:extLst xmlns:a="http://schemas.openxmlformats.org/drawingml/2006/main">
+              <a:ext uri="{FF2B5EF4-FFF2-40B4-BE49-F238E27FC236}">
+                <a16:creationId xmlns:a16="http://schemas.microsoft.com/office/drawing/2014/main" id="{D1BB3BF9-150B-4AFE-B263-54C03A47422C}"/>
+              </a:ext>
+            </a:extLst>
+          </p:cNvPr>
+          <p:cNvSpPr>
+            <a:spLocks xmlns:a="http://schemas.openxmlformats.org/drawingml/2006/main" noGrp="1"/>
+          </p:cNvSpPr>
+          <p:nvPr>
+            <p:ph type="subTitle" idx="1"/>
+          </p:nvPr>
+        </p:nvSpPr>
+        <p:spPr>
+          <a:xfrm xmlns:a="http://schemas.openxmlformats.org/drawingml/2006/main">
+            <a:off x="1828800" y="3771900"/>
+            <a:ext cx="8534400" cy="762000"/>
+          </a:xfrm>
+          <a:prstGeom xmlns:a="http://schemas.openxmlformats.org/drawingml/2006/main" prst="rect">
+            <a:avLst/>
+          </a:prstGeom>
+          <a:noFill xmlns:a="http://schemas.openxmlformats.org/drawingml/2006/main"/>
+          <a:ln xmlns:a="http://schemas.openxmlformats.org/drawingml/2006/main">
+            <a:noFill/>
+            <a:prstDash val="solid"/>
+          </a:ln>
+        </p:spPr>
+        <p:txBody>
+          <a:bodyPr xmlns:a="http://schemas.openxmlformats.org/drawingml/2006/main" wrap="square" lIns="0" tIns="0" rIns="0" bIns="0" anchor="ctr">
+            <a:normAutofit/>
+          </a:bodyPr>
+          <a:lstStyle xmlns:a="http://schemas.openxmlformats.org/drawingml/2006/main">
+            <a:defPPr algn="ctr">
+              <a:defRPr sz="2100" b="0">
+                <a:solidFill>
+                  <a:schemeClr val="tx1"/>
+                </a:solidFill>
+                <a:latin typeface="+mn-lt"/>
+                <a:ea typeface="+mn-lt"/>
+                <a:cs typeface="+mn-lt"/>
+              </a:defRPr>
+            </a:defPPr>
+            <a:lvl1pPr marL="0" indent="0">
+              <a:lnSpc>
+                <a:spcPct val="110000"/>
+              </a:lnSpc>
+              <a:spcBef>
+                <a:spcPts val="0"/>
+              </a:spcBef>
+              <a:spcAft>
+                <a:spcPts val="0"/>
+              </a:spcAft>
+              <a:buNone/>
+            </a:lvl1pPr>
+            <a:lvl2pPr marL="0" indent="0">
+              <a:lnSpc>
+                <a:spcPct val="110000"/>
+              </a:lnSpc>
+              <a:spcBef>
+                <a:spcPts val="0"/>
+              </a:spcBef>
+              <a:spcAft>
+                <a:spcPts val="0"/>
+              </a:spcAft>
+              <a:buNone/>
+            </a:lvl2pPr>
+            <a:lvl3pPr marL="0" indent="0">
+              <a:lnSpc>
+                <a:spcPct val="110000"/>
+              </a:lnSpc>
+              <a:spcBef>
+                <a:spcPts val="0"/>
+              </a:spcBef>
+              <a:spcAft>
+                <a:spcPts val="0"/>
+              </a:spcAft>
+              <a:buNone/>
+            </a:lvl3pPr>
+            <a:lvl4pPr marL="0" indent="0">
+              <a:lnSpc>
+                <a:spcPct val="110000"/>
+              </a:lnSpc>
+              <a:spcBef>
+                <a:spcPts val="0"/>
+              </a:spcBef>
+              <a:spcAft>
+                <a:spcPts val="0"/>
+              </a:spcAft>
+              <a:buNone/>
+            </a:lvl4pPr>
+            <a:lvl5pPr marL="0" indent="0">
+              <a:lnSpc>
+                <a:spcPct val="110000"/>
+              </a:lnSpc>
+              <a:spcBef>
+                <a:spcPts val="0"/>
+              </a:spcBef>
+              <a:spcAft>
+                <a:spcPts val="0"/>
+              </a:spcAft>
+              <a:buNone/>
+            </a:lvl5pPr>
+            <a:lvl6pPr marL="0" indent="0">
+              <a:lnSpc>
+                <a:spcPct val="110000"/>
+              </a:lnSpc>
+              <a:spcBef>
+                <a:spcPts val="0"/>
+              </a:spcBef>
+              <a:spcAft>
+                <a:spcPts val="0"/>
+              </a:spcAft>
+              <a:buNone/>
+            </a:lvl6pPr>
+            <a:lvl7pPr marL="0" indent="0">
+              <a:lnSpc>
+                <a:spcPct val="110000"/>
+              </a:lnSpc>
+              <a:spcBef>
+                <a:spcPts val="0"/>
+              </a:spcBef>
+              <a:spcAft>
+                <a:spcPts val="0"/>
+              </a:spcAft>
+              <a:buNone/>
+            </a:lvl7pPr>
+            <a:lvl8pPr marL="0" indent="0">
+              <a:lnSpc>
+                <a:spcPct val="110000"/>
+              </a:lnSpc>
+              <a:spcBef>
+                <a:spcPts val="0"/>
+              </a:spcBef>
+              <a:spcAft>
+                <a:spcPts val="0"/>
+              </a:spcAft>
+              <a:buNone/>
+            </a:lvl8pPr>
+            <a:lvl9pPr marL="0" indent="0">
+              <a:lnSpc>
+                <a:spcPct val="110000"/>
+              </a:lnSpc>
+              <a:spcBef>
+                <a:spcPts val="0"/>
+              </a:spcBef>
+              <a:spcAft>
+                <a:spcPts val="0"/>
+              </a:spcAft>
+              <a:buNone/>
+            </a:lvl9pPr>
+          </a:lstStyle>
+          <a:p xmlns:a="http://schemas.openxmlformats.org/drawingml/2006/main"/>
+        </p:txBody>
+      </p:sp>
+    </p:spTree>
+  </p:cSld>
+</p:sldLayout>
+</file>
+
+<file path=ppt/slideLayouts/slideLayout2.xml><?xml version="1.0" encoding="utf-8"?>
+<p:sldLayout xmlns:p="http://schemas.openxmlformats.org/presentationml/2006/main">
+  <p:cSld name="Section Header">
+    <p:spTree>
+      <p:nvGrpSpPr>
+        <p:cNvPr id="1" name=""/>
+        <p:cNvGrpSpPr/>
+        <p:nvPr/>
+      </p:nvGrpSpPr>
+      <p:grpSpPr>
+        <a:xfrm xmlns:a="http://schemas.openxmlformats.org/drawingml/2006/main"/>
+      </p:grpSpPr>
+      <p:sp>
+        <p:nvSpPr>
+          <p:cNvPr id="2" name="Section title">
+            <a:extLst xmlns:a="http://schemas.openxmlformats.org/drawingml/2006/main">
+              <a:ext uri="{FF2B5EF4-FFF2-40B4-BE49-F238E27FC236}">
+                <a16:creationId xmlns:a16="http://schemas.microsoft.com/office/drawing/2014/main" id="{6DBEBFD5-A764-4820-87E5-8BC50060C521}"/>
+              </a:ext>
+            </a:extLst>
+          </p:cNvPr>
+          <p:cNvSpPr>
+            <a:spLocks xmlns:a="http://schemas.openxmlformats.org/drawingml/2006/main" noGrp="1"/>
+          </p:cNvSpPr>
+          <p:nvPr>
+            <p:ph type="title" idx="0"/>
+          </p:nvPr>
+        </p:nvSpPr>
+        <p:spPr>
+          <a:xfrm xmlns:a="http://schemas.openxmlformats.org/drawingml/2006/main">
+            <a:off x="1219200" y="2857500"/>
+            <a:ext cx="9753600" cy="1143000"/>
+          </a:xfrm>
+          <a:prstGeom xmlns:a="http://schemas.openxmlformats.org/drawingml/2006/main" prst="rect">
+            <a:avLst/>
+          </a:prstGeom>
+          <a:noFill xmlns:a="http://schemas.openxmlformats.org/drawingml/2006/main"/>
+          <a:ln xmlns:a="http://schemas.openxmlformats.org/drawingml/2006/main">
+            <a:noFill/>
+            <a:prstDash val="solid"/>
+          </a:ln>
+        </p:spPr>
+        <p:txBody>
+          <a:bodyPr xmlns:a="http://schemas.openxmlformats.org/drawingml/2006/main" wrap="square" lIns="0" tIns="0" rIns="0" bIns="0" anchor="ctr">
+            <a:normAutofit/>
+          </a:bodyPr>
+          <a:lstStyle xmlns:a="http://schemas.openxmlformats.org/drawingml/2006/main">
+            <a:defPPr algn="ctr">
+              <a:defRPr sz="4200" b="1">
+                <a:solidFill>
+                  <a:schemeClr val="tx1"/>
+                </a:solidFill>
+                <a:latin typeface="+mj-lt"/>
+                <a:ea typeface="+mj-lt"/>
+                <a:cs typeface="+mj-lt"/>
+              </a:defRPr>
+            </a:defPPr>
+            <a:lvl1pPr marL="0" indent="0">
+              <a:lnSpc>
+                <a:spcPct val="110000"/>
+              </a:lnSpc>
+              <a:spcBef>
+                <a:spcPts val="0"/>
+              </a:spcBef>
+              <a:spcAft>
+                <a:spcPts val="0"/>
+              </a:spcAft>
+              <a:buNone/>
+            </a:lvl1pPr>
+            <a:lvl2pPr marL="0" indent="0">
+              <a:lnSpc>
+                <a:spcPct val="110000"/>
+              </a:lnSpc>
+              <a:spcBef>
+                <a:spcPts val="0"/>
+              </a:spcBef>
+              <a:spcAft>
+                <a:spcPts val="0"/>
+              </a:spcAft>
+              <a:buNone/>
+            </a:lvl2pPr>
+            <a:lvl3pPr marL="0" indent="0">
+              <a:lnSpc>
+                <a:spcPct val="110000"/>
+              </a:lnSpc>
+              <a:spcBef>
+                <a:spcPts val="0"/>
+              </a:spcBef>
+              <a:spcAft>
+                <a:spcPts val="0"/>
+              </a:spcAft>
+              <a:buNone/>
+            </a:lvl3pPr>
+            <a:lvl4pPr marL="0" indent="0">
+              <a:lnSpc>
+                <a:spcPct val="110000"/>
+              </a:lnSpc>
+              <a:spcBef>
+                <a:spcPts val="0"/>
+              </a:spcBef>
+              <a:spcAft>
+                <a:spcPts val="0"/>
+              </a:spcAft>
+              <a:buNone/>
+            </a:lvl4pPr>
+            <a:lvl5pPr marL="0" indent="0">
+              <a:lnSpc>
+                <a:spcPct val="110000"/>
+              </a:lnSpc>
+              <a:spcBef>
+                <a:spcPts val="0"/>
+              </a:spcBef>
+              <a:spcAft>
+                <a:spcPts val="0"/>
+              </a:spcAft>
+              <a:buNone/>
+            </a:lvl5pPr>
+            <a:lvl6pPr marL="0" indent="0">
+              <a:lnSpc>
+                <a:spcPct val="110000"/>
+              </a:lnSpc>
+              <a:spcBef>
+                <a:spcPts val="0"/>
+              </a:spcBef>
+              <a:spcAft>
+                <a:spcPts val="0"/>
+              </a:spcAft>
+              <a:buNone/>
+            </a:lvl6pPr>
+            <a:lvl7pPr marL="0" indent="0">
+              <a:lnSpc>
+                <a:spcPct val="110000"/>
+              </a:lnSpc>
+              <a:spcBef>
+                <a:spcPts val="0"/>
+              </a:spcBef>
+              <a:spcAft>
+                <a:spcPts val="0"/>
+              </a:spcAft>
+              <a:buNone/>
+            </a:lvl7pPr>
+            <a:lvl8pPr marL="0" indent="0">
+              <a:lnSpc>
+                <a:spcPct val="110000"/>
+              </a:lnSpc>
+              <a:spcBef>
+                <a:spcPts val="0"/>
+              </a:spcBef>
+              <a:spcAft>
+                <a:spcPts val="0"/>
+              </a:spcAft>
+              <a:buNone/>
+            </a:lvl8pPr>
+            <a:lvl9pPr marL="0" indent="0">
+              <a:lnSpc>
+                <a:spcPct val="110000"/>
+              </a:lnSpc>
+              <a:spcBef>
+                <a:spcPts val="0"/>
+              </a:spcBef>
+              <a:spcAft>
+                <a:spcPts val="0"/>
+              </a:spcAft>
+              <a:buNone/>
+            </a:lvl9pPr>
+          </a:lstStyle>
+          <a:p xmlns:a="http://schemas.openxmlformats.org/drawingml/2006/main"/>
+        </p:txBody>
+      </p:sp>
+    </p:spTree>
+  </p:cSld>
+</p:sldLayout>
+</file>
+
+<file path=ppt/slideLayouts/slideLayout3.xml><?xml version="1.0" encoding="utf-8"?>
+<p:sldLayout xmlns:p="http://schemas.openxmlformats.org/presentationml/2006/main">
+  <p:cSld name="Title and Body">
+    <p:spTree>
+      <p:nvGrpSpPr>
+        <p:cNvPr id="1" name=""/>
+        <p:cNvGrpSpPr/>
+        <p:nvPr/>
+      </p:nvGrpSpPr>
+      <p:grpSpPr>
+        <a:xfrm xmlns:a="http://schemas.openxmlformats.org/drawingml/2006/main"/>
+      </p:grpSpPr>
+      <p:sp>
+        <p:nvSpPr>
+          <p:cNvPr id="3" name="Title">
+            <a:extLst xmlns:a="http://schemas.openxmlformats.org/drawingml/2006/main">
+              <a:ext uri="{FF2B5EF4-FFF2-40B4-BE49-F238E27FC236}">
+                <a16:creationId xmlns:a16="http://schemas.microsoft.com/office/drawing/2014/main" id="{C3D00279-4FF8-4391-9FEE-3982F55105CD}"/>
+              </a:ext>
+            </a:extLst>
+          </p:cNvPr>
+          <p:cNvSpPr>
+            <a:spLocks xmlns:a="http://schemas.openxmlformats.org/drawingml/2006/main" noGrp="1"/>
+          </p:cNvSpPr>
+          <p:nvPr>
+            <p:ph type="title" idx="0"/>
+          </p:nvPr>
+        </p:nvSpPr>
+        <p:spPr>
+          <a:xfrm xmlns:a="http://schemas.openxmlformats.org/drawingml/2006/main">
+            <a:off x="685800" y="533400"/>
+            <a:ext cx="10820400" cy="838200"/>
+          </a:xfrm>
+          <a:prstGeom xmlns:a="http://schemas.openxmlformats.org/drawingml/2006/main" prst="rect">
+            <a:avLst/>
+          </a:prstGeom>
+          <a:noFill xmlns:a="http://schemas.openxmlformats.org/drawingml/2006/main"/>
+          <a:ln xmlns:a="http://schemas.openxmlformats.org/drawingml/2006/main">
+            <a:noFill/>
+            <a:prstDash val="solid"/>
+          </a:ln>
+        </p:spPr>
+        <p:txBody>
+          <a:bodyPr xmlns:a="http://schemas.openxmlformats.org/drawingml/2006/main" wrap="square" lIns="0" tIns="0" rIns="0" bIns="0" anchor="t">
+            <a:normAutofit/>
+          </a:bodyPr>
+          <a:lstStyle xmlns:a="http://schemas.openxmlformats.org/drawingml/2006/main">
+            <a:defPPr algn="l">
+              <a:defRPr sz="3300" b="1">
+                <a:solidFill>
+                  <a:schemeClr val="tx1"/>
+                </a:solidFill>
+                <a:latin typeface="+mj-lt"/>
+                <a:ea typeface="+mj-lt"/>
+                <a:cs typeface="+mj-lt"/>
+              </a:defRPr>
+            </a:defPPr>
+            <a:lvl1pPr marL="0" indent="0">
+              <a:lnSpc>
+                <a:spcPct val="110000"/>
+              </a:lnSpc>
+              <a:spcBef>
+                <a:spcPts val="0"/>
+              </a:spcBef>
+              <a:spcAft>
+                <a:spcPts val="0"/>
+              </a:spcAft>
+              <a:buNone/>
+            </a:lvl1pPr>
+            <a:lvl2pPr marL="0" indent="0">
+              <a:lnSpc>
+                <a:spcPct val="110000"/>
+              </a:lnSpc>
+              <a:spcBef>
+                <a:spcPts val="0"/>
+              </a:spcBef>
+              <a:spcAft>
+                <a:spcPts val="0"/>
+              </a:spcAft>
+              <a:buNone/>
+            </a:lvl2pPr>
+            <a:lvl3pPr marL="0" indent="0">
+              <a:lnSpc>
+                <a:spcPct val="110000"/>
+              </a:lnSpc>
+              <a:spcBef>
+                <a:spcPts val="0"/>
+              </a:spcBef>
+              <a:spcAft>
+                <a:spcPts val="0"/>
+              </a:spcAft>
+              <a:buNone/>
+            </a:lvl3pPr>
+            <a:lvl4pPr marL="0" indent="0">
+              <a:lnSpc>
+                <a:spcPct val="110000"/>
+              </a:lnSpc>
+              <a:spcBef>
+                <a:spcPts val="0"/>
+              </a:spcBef>
+              <a:spcAft>
+                <a:spcPts val="0"/>
+              </a:spcAft>
+              <a:buNone/>
+            </a:lvl4pPr>
+            <a:lvl5pPr marL="0" indent="0">
+              <a:lnSpc>
+                <a:spcPct val="110000"/>
+              </a:lnSpc>
+              <a:spcBef>
+                <a:spcPts val="0"/>
+              </a:spcBef>
+              <a:spcAft>
+                <a:spcPts val="0"/>
+              </a:spcAft>
+              <a:buNone/>
+            </a:lvl5pPr>
+            <a:lvl6pPr marL="0" indent="0">
+              <a:lnSpc>
+                <a:spcPct val="110000"/>
+              </a:lnSpc>
+              <a:spcBef>
+                <a:spcPts val="0"/>
+              </a:spcBef>
+              <a:spcAft>
+                <a:spcPts val="0"/>
+              </a:spcAft>
+              <a:buNone/>
+            </a:lvl6pPr>
+            <a:lvl7pPr marL="0" indent="0">
+              <a:lnSpc>
+                <a:spcPct val="110000"/>
+              </a:lnSpc>
+              <a:spcBef>
+                <a:spcPts val="0"/>
+              </a:spcBef>
+              <a:spcAft>
+                <a:spcPts val="0"/>
+              </a:spcAft>
+              <a:buNone/>
+            </a:lvl7pPr>
+            <a:lvl8pPr marL="0" indent="0">
+              <a:lnSpc>
+                <a:spcPct val="110000"/>
+              </a:lnSpc>
+              <a:spcBef>
+                <a:spcPts val="0"/>
+              </a:spcBef>
+              <a:spcAft>
+                <a:spcPts val="0"/>
+              </a:spcAft>
+              <a:buNone/>
+            </a:lvl8pPr>
+            <a:lvl9pPr marL="0" indent="0">
+              <a:lnSpc>
+                <a:spcPct val="110000"/>
+              </a:lnSpc>
+              <a:spcBef>
+                <a:spcPts val="0"/>
+              </a:spcBef>
+              <a:spcAft>
+                <a:spcPts val="0"/>
+              </a:spcAft>
+              <a:buNone/>
+            </a:lvl9pPr>
+          </a:lstStyle>
+          <a:p xmlns:a="http://schemas.openxmlformats.org/drawingml/2006/main"/>
+        </p:txBody>
+      </p:sp>
+      <p:sp>
+        <p:nvSpPr>
+          <p:cNvPr id="2" name="Body">
+            <a:extLst xmlns:a="http://schemas.openxmlformats.org/drawingml/2006/main">
+              <a:ext uri="{FF2B5EF4-FFF2-40B4-BE49-F238E27FC236}">
+                <a16:creationId xmlns:a16="http://schemas.microsoft.com/office/drawing/2014/main" id="{E42926CF-C506-42B1-9246-E9D36A37FAD7}"/>
+              </a:ext>
+            </a:extLst>
+          </p:cNvPr>
+          <p:cNvSpPr>
+            <a:spLocks xmlns:a="http://schemas.openxmlformats.org/drawingml/2006/main" noGrp="1"/>
+          </p:cNvSpPr>
+          <p:nvPr>
+            <p:ph type="body" idx="1"/>
+          </p:nvPr>
+        </p:nvSpPr>
+        <p:spPr>
+          <a:xfrm xmlns:a="http://schemas.openxmlformats.org/drawingml/2006/main">
+            <a:off x="685800" y="1905000"/>
+            <a:ext cx="10820400" cy="4267200"/>
+          </a:xfrm>
+          <a:prstGeom xmlns:a="http://schemas.openxmlformats.org/drawingml/2006/main" prst="rect">
+            <a:avLst/>
+          </a:prstGeom>
+          <a:noFill xmlns:a="http://schemas.openxmlformats.org/drawingml/2006/main"/>
+          <a:ln xmlns:a="http://schemas.openxmlformats.org/drawingml/2006/main">
+            <a:noFill/>
+            <a:prstDash val="solid"/>
+          </a:ln>
+        </p:spPr>
+        <p:txBody>
+          <a:bodyPr xmlns:a="http://schemas.openxmlformats.org/drawingml/2006/main" wrap="square" lIns="0" tIns="0" rIns="0" bIns="0" anchor="t">
+            <a:normAutofit/>
+          </a:bodyPr>
+          <a:lstStyle xmlns:a="http://schemas.openxmlformats.org/drawingml/2006/main">
+            <a:defPPr algn="l">
+              <a:defRPr sz="2250" b="0">
+                <a:solidFill>
+                  <a:schemeClr val="tx1"/>
+                </a:solidFill>
+                <a:latin typeface="+mn-lt"/>
+                <a:ea typeface="+mn-lt"/>
+                <a:cs typeface="+mn-lt"/>
+              </a:defRPr>
+            </a:defPPr>
+            <a:lvl1pPr marL="228600" indent="-228600">
+              <a:lnSpc>
+                <a:spcPct val="110000"/>
+              </a:lnSpc>
+              <a:spcBef>
+                <a:spcPts val="0"/>
+              </a:spcBef>
+              <a:spcAft>
+                <a:spcPts val="1200"/>
+              </a:spcAft>
+              <a:buChar char="•"/>
+            </a:lvl1pPr>
+            <a:lvl2pPr marL="533400" indent="-228600">
+              <a:lnSpc>
+                <a:spcPct val="110000"/>
+              </a:lnSpc>
+              <a:spcBef>
+                <a:spcPts val="0"/>
+              </a:spcBef>
+              <a:spcAft>
+                <a:spcPts val="1200"/>
+              </a:spcAft>
+              <a:buChar char="•"/>
+            </a:lvl2pPr>
+            <a:lvl3pPr marL="838200" indent="-228600">
+              <a:lnSpc>
+                <a:spcPct val="110000"/>
+              </a:lnSpc>
+              <a:spcBef>
+                <a:spcPts val="0"/>
+              </a:spcBef>
+              <a:spcAft>
+                <a:spcPts val="1200"/>
+              </a:spcAft>
+              <a:buChar char="•"/>
+            </a:lvl3pPr>
+            <a:lvl4pPr marL="1143000" indent="-228600">
+              <a:lnSpc>
+                <a:spcPct val="110000"/>
+              </a:lnSpc>
+              <a:spcBef>
+                <a:spcPts val="0"/>
+              </a:spcBef>
+              <a:spcAft>
+                <a:spcPts val="1200"/>
+              </a:spcAft>
+              <a:buChar char="•"/>
+            </a:lvl4pPr>
+            <a:lvl5pPr marL="1447800" indent="-228600">
+              <a:lnSpc>
+                <a:spcPct val="110000"/>
+              </a:lnSpc>
+              <a:spcBef>
+                <a:spcPts val="0"/>
+              </a:spcBef>
+              <a:spcAft>
+                <a:spcPts val="1200"/>
+              </a:spcAft>
+              <a:buChar char="•"/>
+            </a:lvl5pPr>
+            <a:lvl6pPr marL="1752600" indent="-228600">
+              <a:lnSpc>
+                <a:spcPct val="110000"/>
+              </a:lnSpc>
+              <a:spcBef>
+                <a:spcPts val="0"/>
+              </a:spcBef>
+              <a:spcAft>
+                <a:spcPts val="1200"/>
+              </a:spcAft>
+              <a:buChar char="•"/>
+            </a:lvl6pPr>
+            <a:lvl7pPr marL="2057400" indent="-228600">
+              <a:lnSpc>
+                <a:spcPct val="110000"/>
+              </a:lnSpc>
+              <a:spcBef>
+                <a:spcPts val="0"/>
+              </a:spcBef>
+              <a:spcAft>
+                <a:spcPts val="1200"/>
+              </a:spcAft>
+              <a:buChar char="•"/>
+            </a:lvl7pPr>
+            <a:lvl8pPr marL="2362200" indent="-228600">
+              <a:lnSpc>
+                <a:spcPct val="110000"/>
+              </a:lnSpc>
+              <a:spcBef>
+                <a:spcPts val="0"/>
+              </a:spcBef>
+              <a:spcAft>
+                <a:spcPts val="1200"/>
+              </a:spcAft>
+              <a:buChar char="•"/>
+            </a:lvl8pPr>
+            <a:lvl9pPr marL="2667000" indent="-228600">
+              <a:lnSpc>
+                <a:spcPct val="110000"/>
+              </a:lnSpc>
+              <a:spcBef>
+                <a:spcPts val="0"/>
+              </a:spcBef>
+              <a:spcAft>
+                <a:spcPts val="1200"/>
+              </a:spcAft>
+              <a:buChar char="•"/>
+            </a:lvl9pPr>
+          </a:lstStyle>
+          <a:p xmlns:a="http://schemas.openxmlformats.org/drawingml/2006/main"/>
+        </p:txBody>
+      </p:sp>
+    </p:spTree>
+  </p:cSld>
+</p:sldLayout>
+</file>
+
+<file path=ppt/slideLayouts/slideLayout4.xml><?xml version="1.0" encoding="utf-8"?>
+<p:sldLayout xmlns:p="http://schemas.openxmlformats.org/presentationml/2006/main">
+  <p:cSld name="Title and Two Column">
+    <p:spTree>
+      <p:nvGrpSpPr>
+        <p:cNvPr id="1" name=""/>
+        <p:cNvGrpSpPr/>
+        <p:nvPr/>
+      </p:nvGrpSpPr>
+      <p:grpSpPr>
+        <a:xfrm xmlns:a="http://schemas.openxmlformats.org/drawingml/2006/main"/>
+      </p:grpSpPr>
+      <p:sp>
+        <p:nvSpPr>
+          <p:cNvPr id="4" name="Title">
+            <a:extLst xmlns:a="http://schemas.openxmlformats.org/drawingml/2006/main">
+              <a:ext uri="{FF2B5EF4-FFF2-40B4-BE49-F238E27FC236}">
+                <a16:creationId xmlns:a16="http://schemas.microsoft.com/office/drawing/2014/main" id="{B4E53404-62EF-47A9-AF18-F16A22510E68}"/>
+              </a:ext>
+            </a:extLst>
+          </p:cNvPr>
+          <p:cNvSpPr>
+            <a:spLocks xmlns:a="http://schemas.openxmlformats.org/drawingml/2006/main" noGrp="1"/>
+          </p:cNvSpPr>
+          <p:nvPr>
+            <p:ph type="title" idx="0"/>
+          </p:nvPr>
+        </p:nvSpPr>
+        <p:spPr>
+          <a:xfrm xmlns:a="http://schemas.openxmlformats.org/drawingml/2006/main">
+            <a:off x="685800" y="533400"/>
+            <a:ext cx="10820400" cy="838200"/>
+          </a:xfrm>
+          <a:prstGeom xmlns:a="http://schemas.openxmlformats.org/drawingml/2006/main" prst="rect">
+            <a:avLst/>
+          </a:prstGeom>
+          <a:noFill xmlns:a="http://schemas.openxmlformats.org/drawingml/2006/main"/>
+          <a:ln xmlns:a="http://schemas.openxmlformats.org/drawingml/2006/main">
+            <a:noFill/>
+            <a:prstDash val="solid"/>
+          </a:ln>
+        </p:spPr>
+        <p:txBody>
+          <a:bodyPr xmlns:a="http://schemas.openxmlformats.org/drawingml/2006/main" wrap="square" lIns="0" tIns="0" rIns="0" bIns="0" anchor="t">
+            <a:normAutofit/>
+          </a:bodyPr>
+          <a:lstStyle xmlns:a="http://schemas.openxmlformats.org/drawingml/2006/main">
+            <a:defPPr algn="l">
+              <a:defRPr sz="3300" b="1">
+                <a:solidFill>
+                  <a:schemeClr val="tx1"/>
+                </a:solidFill>
+                <a:latin typeface="+mj-lt"/>
+                <a:ea typeface="+mj-lt"/>
+                <a:cs typeface="+mj-lt"/>
+              </a:defRPr>
+            </a:defPPr>
+            <a:lvl1pPr marL="0" indent="0">
+              <a:lnSpc>
+                <a:spcPct val="110000"/>
+              </a:lnSpc>
+              <a:spcBef>
+                <a:spcPts val="0"/>
+              </a:spcBef>
+              <a:spcAft>
+                <a:spcPts val="0"/>
+              </a:spcAft>
+              <a:buNone/>
+            </a:lvl1pPr>
+            <a:lvl2pPr marL="0" indent="0">
+              <a:lnSpc>
+                <a:spcPct val="110000"/>
+              </a:lnSpc>
+              <a:spcBef>
+                <a:spcPts val="0"/>
+              </a:spcBef>
+              <a:spcAft>
+                <a:spcPts val="0"/>
+              </a:spcAft>
+              <a:buNone/>
+            </a:lvl2pPr>
+            <a:lvl3pPr marL="0" indent="0">
+              <a:lnSpc>
+                <a:spcPct val="110000"/>
+              </a:lnSpc>
+              <a:spcBef>
+                <a:spcPts val="0"/>
+              </a:spcBef>
+              <a:spcAft>
+                <a:spcPts val="0"/>
+              </a:spcAft>
+              <a:buNone/>
+            </a:lvl3pPr>
+            <a:lvl4pPr marL="0" indent="0">
+              <a:lnSpc>
+                <a:spcPct val="110000"/>
+              </a:lnSpc>
+              <a:spcBef>
+                <a:spcPts val="0"/>
+              </a:spcBef>
+              <a:spcAft>
+                <a:spcPts val="0"/>
+              </a:spcAft>
+              <a:buNone/>
+            </a:lvl4pPr>
+            <a:lvl5pPr marL="0" indent="0">
+              <a:lnSpc>
+                <a:spcPct val="110000"/>
+              </a:lnSpc>
+              <a:spcBef>
+                <a:spcPts val="0"/>
+              </a:spcBef>
+              <a:spcAft>
+                <a:spcPts val="0"/>
+              </a:spcAft>
+              <a:buNone/>
+            </a:lvl5pPr>
+            <a:lvl6pPr marL="0" indent="0">
+              <a:lnSpc>
+                <a:spcPct val="110000"/>
+              </a:lnSpc>
+              <a:spcBef>
+                <a:spcPts val="0"/>
+              </a:spcBef>
+              <a:spcAft>
+                <a:spcPts val="0"/>
+              </a:spcAft>
+              <a:buNone/>
+            </a:lvl6pPr>
+            <a:lvl7pPr marL="0" indent="0">
+              <a:lnSpc>
+                <a:spcPct val="110000"/>
+              </a:lnSpc>
+              <a:spcBef>
+                <a:spcPts val="0"/>
+              </a:spcBef>
+              <a:spcAft>
+                <a:spcPts val="0"/>
+              </a:spcAft>
+              <a:buNone/>
+            </a:lvl7pPr>
+            <a:lvl8pPr marL="0" indent="0">
+              <a:lnSpc>
+                <a:spcPct val="110000"/>
+              </a:lnSpc>
+              <a:spcBef>
+                <a:spcPts val="0"/>
+              </a:spcBef>
+              <a:spcAft>
+                <a:spcPts val="0"/>
+              </a:spcAft>
+              <a:buNone/>
+            </a:lvl8pPr>
+            <a:lvl9pPr marL="0" indent="0">
+              <a:lnSpc>
+                <a:spcPct val="110000"/>
+              </a:lnSpc>
+              <a:spcBef>
+                <a:spcPts val="0"/>
+              </a:spcBef>
+              <a:spcAft>
+                <a:spcPts val="0"/>
+              </a:spcAft>
+              <a:buNone/>
+            </a:lvl9pPr>
+          </a:lstStyle>
+          <a:p xmlns:a="http://schemas.openxmlformats.org/drawingml/2006/main"/>
+        </p:txBody>
+      </p:sp>
+      <p:sp>
+        <p:nvSpPr>
+          <p:cNvPr id="2" name="Left column">
+            <a:extLst xmlns:a="http://schemas.openxmlformats.org/drawingml/2006/main">
+              <a:ext uri="{FF2B5EF4-FFF2-40B4-BE49-F238E27FC236}">
+                <a16:creationId xmlns:a16="http://schemas.microsoft.com/office/drawing/2014/main" id="{9AA1DE4C-50F1-4990-92CD-B814C9EED8A9}"/>
+              </a:ext>
+            </a:extLst>
+          </p:cNvPr>
+          <p:cNvSpPr>
+            <a:spLocks xmlns:a="http://schemas.openxmlformats.org/drawingml/2006/main" noGrp="1"/>
+          </p:cNvSpPr>
+          <p:nvPr>
+            <p:ph type="body" idx="1"/>
+          </p:nvPr>
+        </p:nvSpPr>
+        <p:spPr>
+          <a:xfrm xmlns:a="http://schemas.openxmlformats.org/drawingml/2006/main">
+            <a:off x="685800" y="1905000"/>
+            <a:ext cx="5029200" cy="4267200"/>
+          </a:xfrm>
+          <a:prstGeom xmlns:a="http://schemas.openxmlformats.org/drawingml/2006/main" prst="rect">
+            <a:avLst/>
+          </a:prstGeom>
+          <a:noFill xmlns:a="http://schemas.openxmlformats.org/drawingml/2006/main"/>
+          <a:ln xmlns:a="http://schemas.openxmlformats.org/drawingml/2006/main">
+            <a:noFill/>
+            <a:prstDash val="solid"/>
+          </a:ln>
+        </p:spPr>
+        <p:txBody>
+          <a:bodyPr xmlns:a="http://schemas.openxmlformats.org/drawingml/2006/main" wrap="square" lIns="0" tIns="0" rIns="0" bIns="0" anchor="t">
+            <a:normAutofit/>
+          </a:bodyPr>
+          <a:lstStyle xmlns:a="http://schemas.openxmlformats.org/drawingml/2006/main">
+            <a:defPPr algn="l">
+              <a:defRPr sz="2100" b="0">
+                <a:solidFill>
+                  <a:schemeClr val="tx1"/>
+                </a:solidFill>
+                <a:latin typeface="+mn-lt"/>
+                <a:ea typeface="+mn-lt"/>
+                <a:cs typeface="+mn-lt"/>
+              </a:defRPr>
+            </a:defPPr>
+            <a:lvl1pPr marL="228600" indent="-228600">
+              <a:lnSpc>
+                <a:spcPct val="110000"/>
+              </a:lnSpc>
+              <a:spcBef>
+                <a:spcPts val="0"/>
+              </a:spcBef>
+              <a:spcAft>
+                <a:spcPts val="1200"/>
+              </a:spcAft>
+              <a:buChar char="•"/>
+            </a:lvl1pPr>
+            <a:lvl2pPr marL="533400" indent="-228600">
+              <a:lnSpc>
+                <a:spcPct val="110000"/>
+              </a:lnSpc>
+              <a:spcBef>
+                <a:spcPts val="0"/>
+              </a:spcBef>
+              <a:spcAft>
+                <a:spcPts val="1200"/>
+              </a:spcAft>
+              <a:buChar char="•"/>
+            </a:lvl2pPr>
+            <a:lvl3pPr marL="838200" indent="-228600">
+              <a:lnSpc>
+                <a:spcPct val="110000"/>
+              </a:lnSpc>
+              <a:spcBef>
+                <a:spcPts val="0"/>
+              </a:spcBef>
+              <a:spcAft>
+                <a:spcPts val="1200"/>
+              </a:spcAft>
+              <a:buChar char="•"/>
+            </a:lvl3pPr>
+            <a:lvl4pPr marL="1143000" indent="-228600">
+              <a:lnSpc>
+                <a:spcPct val="110000"/>
+              </a:lnSpc>
+              <a:spcBef>
+                <a:spcPts val="0"/>
+              </a:spcBef>
+              <a:spcAft>
+                <a:spcPts val="1200"/>
+              </a:spcAft>
+              <a:buChar char="•"/>
+            </a:lvl4pPr>
+            <a:lvl5pPr marL="1447800" indent="-228600">
+              <a:lnSpc>
+                <a:spcPct val="110000"/>
+              </a:lnSpc>
+              <a:spcBef>
+                <a:spcPts val="0"/>
+              </a:spcBef>
+              <a:spcAft>
+                <a:spcPts val="1200"/>
+              </a:spcAft>
+              <a:buChar char="•"/>
+            </a:lvl5pPr>
+            <a:lvl6pPr marL="1752600" indent="-228600">
+              <a:lnSpc>
+                <a:spcPct val="110000"/>
+              </a:lnSpc>
+              <a:spcBef>
+                <a:spcPts val="0"/>
+              </a:spcBef>
+              <a:spcAft>
+                <a:spcPts val="1200"/>
+              </a:spcAft>
+              <a:buChar char="•"/>
+            </a:lvl6pPr>
+            <a:lvl7pPr marL="2057400" indent="-228600">
+              <a:lnSpc>
+                <a:spcPct val="110000"/>
+              </a:lnSpc>
+              <a:spcBef>
+                <a:spcPts val="0"/>
+              </a:spcBef>
+              <a:spcAft>
+                <a:spcPts val="1200"/>
+              </a:spcAft>
+              <a:buChar char="•"/>
+            </a:lvl7pPr>
+            <a:lvl8pPr marL="2362200" indent="-228600">
+              <a:lnSpc>
+                <a:spcPct val="110000"/>
+              </a:lnSpc>
+              <a:spcBef>
+                <a:spcPts val="0"/>
+              </a:spcBef>
+              <a:spcAft>
+                <a:spcPts val="1200"/>
+              </a:spcAft>
+              <a:buChar char="•"/>
+            </a:lvl8pPr>
+            <a:lvl9pPr marL="2667000" indent="-228600">
+              <a:lnSpc>
+                <a:spcPct val="110000"/>
+              </a:lnSpc>
+              <a:spcBef>
+                <a:spcPts val="0"/>
+              </a:spcBef>
+              <a:spcAft>
+                <a:spcPts val="1200"/>
+              </a:spcAft>
+              <a:buChar char="•"/>
+            </a:lvl9pPr>
+          </a:lstStyle>
+          <a:p xmlns:a="http://schemas.openxmlformats.org/drawingml/2006/main"/>
+        </p:txBody>
+      </p:sp>
+      <p:sp>
+        <p:nvSpPr>
+          <p:cNvPr id="3" name="Right column">
+            <a:extLst xmlns:a="http://schemas.openxmlformats.org/drawingml/2006/main">
+              <a:ext uri="{FF2B5EF4-FFF2-40B4-BE49-F238E27FC236}">
+                <a16:creationId xmlns:a16="http://schemas.microsoft.com/office/drawing/2014/main" id="{31818685-7CDE-4252-90FB-437A92491E37}"/>
+              </a:ext>
+            </a:extLst>
+          </p:cNvPr>
+          <p:cNvSpPr>
+            <a:spLocks xmlns:a="http://schemas.openxmlformats.org/drawingml/2006/main" noGrp="1"/>
+          </p:cNvSpPr>
+          <p:nvPr>
+            <p:ph type="body" idx="2"/>
+          </p:nvPr>
+        </p:nvSpPr>
+        <p:spPr>
+          <a:xfrm xmlns:a="http://schemas.openxmlformats.org/drawingml/2006/main">
+            <a:off x="6477000" y="1905000"/>
+            <a:ext cx="5029200" cy="4267200"/>
+          </a:xfrm>
+          <a:prstGeom xmlns:a="http://schemas.openxmlformats.org/drawingml/2006/main" prst="rect">
+            <a:avLst/>
+          </a:prstGeom>
+          <a:noFill xmlns:a="http://schemas.openxmlformats.org/drawingml/2006/main"/>
+          <a:ln xmlns:a="http://schemas.openxmlformats.org/drawingml/2006/main">
+            <a:noFill/>
+            <a:prstDash val="solid"/>
+          </a:ln>
+        </p:spPr>
+        <p:txBody>
+          <a:bodyPr xmlns:a="http://schemas.openxmlformats.org/drawingml/2006/main" wrap="square" lIns="0" tIns="0" rIns="0" bIns="0" anchor="t">
+            <a:normAutofit/>
+          </a:bodyPr>
+          <a:lstStyle xmlns:a="http://schemas.openxmlformats.org/drawingml/2006/main">
+            <a:defPPr algn="l">
+              <a:defRPr sz="2100" b="0">
+                <a:solidFill>
+                  <a:schemeClr val="tx1"/>
+                </a:solidFill>
+                <a:latin typeface="+mn-lt"/>
+                <a:ea typeface="+mn-lt"/>
+                <a:cs typeface="+mn-lt"/>
+              </a:defRPr>
+            </a:defPPr>
+            <a:lvl1pPr marL="228600" indent="-228600">
+              <a:lnSpc>
+                <a:spcPct val="110000"/>
+              </a:lnSpc>
+              <a:spcBef>
+                <a:spcPts val="0"/>
+              </a:spcBef>
+              <a:spcAft>
+                <a:spcPts val="1200"/>
+              </a:spcAft>
+              <a:buChar char="•"/>
+            </a:lvl1pPr>
+            <a:lvl2pPr marL="533400" indent="-228600">
+              <a:lnSpc>
+                <a:spcPct val="110000"/>
+              </a:lnSpc>
+              <a:spcBef>
+                <a:spcPts val="0"/>
+              </a:spcBef>
+              <a:spcAft>
+                <a:spcPts val="1200"/>
+              </a:spcAft>
+              <a:buChar char="•"/>
+            </a:lvl2pPr>
+            <a:lvl3pPr marL="838200" indent="-228600">
+              <a:lnSpc>
+                <a:spcPct val="110000"/>
+              </a:lnSpc>
+              <a:spcBef>
+                <a:spcPts val="0"/>
+              </a:spcBef>
+              <a:spcAft>
+                <a:spcPts val="1200"/>
+              </a:spcAft>
+              <a:buChar char="•"/>
+            </a:lvl3pPr>
+            <a:lvl4pPr marL="1143000" indent="-228600">
+              <a:lnSpc>
+                <a:spcPct val="110000"/>
+              </a:lnSpc>
+              <a:spcBef>
+                <a:spcPts val="0"/>
+              </a:spcBef>
+              <a:spcAft>
+                <a:spcPts val="1200"/>
+              </a:spcAft>
+              <a:buChar char="•"/>
+            </a:lvl4pPr>
+            <a:lvl5pPr marL="1447800" indent="-228600">
+              <a:lnSpc>
+                <a:spcPct val="110000"/>
+              </a:lnSpc>
+              <a:spcBef>
+                <a:spcPts val="0"/>
+              </a:spcBef>
+              <a:spcAft>
+                <a:spcPts val="1200"/>
+              </a:spcAft>
+              <a:buChar char="•"/>
+            </a:lvl5pPr>
+            <a:lvl6pPr marL="1752600" indent="-228600">
+              <a:lnSpc>
+                <a:spcPct val="110000"/>
+              </a:lnSpc>
+              <a:spcBef>
+                <a:spcPts val="0"/>
+              </a:spcBef>
+              <a:spcAft>
+                <a:spcPts val="1200"/>
+              </a:spcAft>
+              <a:buChar char="•"/>
+            </a:lvl6pPr>
+            <a:lvl7pPr marL="2057400" indent="-228600">
+              <a:lnSpc>
+                <a:spcPct val="110000"/>
+              </a:lnSpc>
+              <a:spcBef>
+                <a:spcPts val="0"/>
+              </a:spcBef>
+              <a:spcAft>
+                <a:spcPts val="1200"/>
+              </a:spcAft>
+              <a:buChar char="•"/>
+            </a:lvl7pPr>
+            <a:lvl8pPr marL="2362200" indent="-228600">
+              <a:lnSpc>
+                <a:spcPct val="110000"/>
+              </a:lnSpc>
+              <a:spcBef>
+                <a:spcPts val="0"/>
+              </a:spcBef>
+              <a:spcAft>
+                <a:spcPts val="1200"/>
+              </a:spcAft>
+              <a:buChar char="•"/>
+            </a:lvl8pPr>
+            <a:lvl9pPr marL="2667000" indent="-228600">
+              <a:lnSpc>
+                <a:spcPct val="110000"/>
+              </a:lnSpc>
+              <a:spcBef>
+                <a:spcPts val="0"/>
+              </a:spcBef>
+              <a:spcAft>
+                <a:spcPts val="1200"/>
+              </a:spcAft>
+              <a:buChar char="•"/>
+            </a:lvl9pPr>
+          </a:lstStyle>
+          <a:p xmlns:a="http://schemas.openxmlformats.org/drawingml/2006/main"/>
+        </p:txBody>
+      </p:sp>
+    </p:spTree>
+  </p:cSld>
+</p:sldLayout>
+</file>
+
+<file path=ppt/slideLayouts/slideLayout5.xml><?xml version="1.0" encoding="utf-8"?>
+<p:sldLayout xmlns:p="http://schemas.openxmlformats.org/presentationml/2006/main">
+  <p:cSld name="Title and One Column">
+    <p:spTree>
+      <p:nvGrpSpPr>
+        <p:cNvPr id="1" name=""/>
+        <p:cNvGrpSpPr/>
+        <p:nvPr/>
+      </p:nvGrpSpPr>
+      <p:grpSpPr>
+        <a:xfrm xmlns:a="http://schemas.openxmlformats.org/drawingml/2006/main"/>
+      </p:grpSpPr>
+      <p:sp>
+        <p:nvSpPr>
+          <p:cNvPr id="3" name="Title">
+            <a:extLst xmlns:a="http://schemas.openxmlformats.org/drawingml/2006/main">
+              <a:ext uri="{FF2B5EF4-FFF2-40B4-BE49-F238E27FC236}">
+                <a16:creationId xmlns:a16="http://schemas.microsoft.com/office/drawing/2014/main" id="{8A261A7C-C53C-447F-B78A-3A26296F4F23}"/>
+              </a:ext>
+            </a:extLst>
+          </p:cNvPr>
+          <p:cNvSpPr>
+            <a:spLocks xmlns:a="http://schemas.openxmlformats.org/drawingml/2006/main" noGrp="1"/>
+          </p:cNvSpPr>
+          <p:nvPr>
+            <p:ph type="title" idx="0"/>
+          </p:nvPr>
+        </p:nvSpPr>
+        <p:spPr>
+          <a:xfrm xmlns:a="http://schemas.openxmlformats.org/drawingml/2006/main">
+            <a:off x="685800" y="533400"/>
+            <a:ext cx="10820400" cy="838200"/>
+          </a:xfrm>
+          <a:prstGeom xmlns:a="http://schemas.openxmlformats.org/drawingml/2006/main" prst="rect">
+            <a:avLst/>
+          </a:prstGeom>
+          <a:noFill xmlns:a="http://schemas.openxmlformats.org/drawingml/2006/main"/>
+          <a:ln xmlns:a="http://schemas.openxmlformats.org/drawingml/2006/main">
+            <a:noFill/>
+            <a:prstDash val="solid"/>
+          </a:ln>
+        </p:spPr>
+        <p:txBody>
+          <a:bodyPr xmlns:a="http://schemas.openxmlformats.org/drawingml/2006/main" wrap="square" lIns="0" tIns="0" rIns="0" bIns="0" anchor="t">
+            <a:normAutofit/>
+          </a:bodyPr>
+          <a:lstStyle xmlns:a="http://schemas.openxmlformats.org/drawingml/2006/main">
+            <a:defPPr algn="l">
+              <a:defRPr sz="3300" b="1">
+                <a:solidFill>
+                  <a:schemeClr val="tx1"/>
+                </a:solidFill>
+                <a:latin typeface="+mj-lt"/>
+                <a:ea typeface="+mj-lt"/>
+                <a:cs typeface="+mj-lt"/>
+              </a:defRPr>
+            </a:defPPr>
+            <a:lvl1pPr marL="0" indent="0">
+              <a:lnSpc>
+                <a:spcPct val="110000"/>
+              </a:lnSpc>
+              <a:spcBef>
+                <a:spcPts val="0"/>
+              </a:spcBef>
+              <a:spcAft>
+                <a:spcPts val="0"/>
+              </a:spcAft>
+              <a:buNone/>
+            </a:lvl1pPr>
+            <a:lvl2pPr marL="0" indent="0">
+              <a:lnSpc>
+                <a:spcPct val="110000"/>
+              </a:lnSpc>
+              <a:spcBef>
+                <a:spcPts val="0"/>
+              </a:spcBef>
+              <a:spcAft>
+                <a:spcPts val="0"/>
+              </a:spcAft>
+              <a:buNone/>
+            </a:lvl2pPr>
+            <a:lvl3pPr marL="0" indent="0">
+              <a:lnSpc>
+                <a:spcPct val="110000"/>
+              </a:lnSpc>
+              <a:spcBef>
+                <a:spcPts val="0"/>
+              </a:spcBef>
+              <a:spcAft>
+                <a:spcPts val="0"/>
+              </a:spcAft>
+              <a:buNone/>
+            </a:lvl3pPr>
+            <a:lvl4pPr marL="0" indent="0">
+              <a:lnSpc>
+                <a:spcPct val="110000"/>
+              </a:lnSpc>
+              <a:spcBef>
+                <a:spcPts val="0"/>
+              </a:spcBef>
+              <a:spcAft>
+                <a:spcPts val="0"/>
+              </a:spcAft>
+              <a:buNone/>
+            </a:lvl4pPr>
+            <a:lvl5pPr marL="0" indent="0">
+              <a:lnSpc>
+                <a:spcPct val="110000"/>
+              </a:lnSpc>
+              <a:spcBef>
+                <a:spcPts val="0"/>
+              </a:spcBef>
+              <a:spcAft>
+                <a:spcPts val="0"/>
+              </a:spcAft>
+              <a:buNone/>
+            </a:lvl5pPr>
+            <a:lvl6pPr marL="0" indent="0">
+              <a:lnSpc>
+                <a:spcPct val="110000"/>
+              </a:lnSpc>
+              <a:spcBef>
+                <a:spcPts val="0"/>
+              </a:spcBef>
+              <a:spcAft>
+                <a:spcPts val="0"/>
+              </a:spcAft>
+              <a:buNone/>
+            </a:lvl6pPr>
+            <a:lvl7pPr marL="0" indent="0">
+              <a:lnSpc>
+                <a:spcPct val="110000"/>
+              </a:lnSpc>
+              <a:spcBef>
+                <a:spcPts val="0"/>
+              </a:spcBef>
+              <a:spcAft>
+                <a:spcPts val="0"/>
+              </a:spcAft>
+              <a:buNone/>
+            </a:lvl7pPr>
+            <a:lvl8pPr marL="0" indent="0">
+              <a:lnSpc>
+                <a:spcPct val="110000"/>
+              </a:lnSpc>
+              <a:spcBef>
+                <a:spcPts val="0"/>
+              </a:spcBef>
+              <a:spcAft>
+                <a:spcPts val="0"/>
+              </a:spcAft>
+              <a:buNone/>
+            </a:lvl8pPr>
+            <a:lvl9pPr marL="0" indent="0">
+              <a:lnSpc>
+                <a:spcPct val="110000"/>
+              </a:lnSpc>
+              <a:spcBef>
+                <a:spcPts val="0"/>
+              </a:spcBef>
+              <a:spcAft>
+                <a:spcPts val="0"/>
+              </a:spcAft>
+              <a:buNone/>
+            </a:lvl9pPr>
+          </a:lstStyle>
+          <a:p xmlns:a="http://schemas.openxmlformats.org/drawingml/2006/main"/>
+        </p:txBody>
+      </p:sp>
+      <p:sp>
+        <p:nvSpPr>
+          <p:cNvPr id="2" name="Left column">
+            <a:extLst xmlns:a="http://schemas.openxmlformats.org/drawingml/2006/main">
+              <a:ext uri="{FF2B5EF4-FFF2-40B4-BE49-F238E27FC236}">
+                <a16:creationId xmlns:a16="http://schemas.microsoft.com/office/drawing/2014/main" id="{12B17B5D-E8BA-472A-9A42-0B121D137AA7}"/>
+              </a:ext>
+            </a:extLst>
+          </p:cNvPr>
+          <p:cNvSpPr>
+            <a:spLocks xmlns:a="http://schemas.openxmlformats.org/drawingml/2006/main" noGrp="1"/>
+          </p:cNvSpPr>
+          <p:nvPr>
+            <p:ph type="body" idx="1"/>
+          </p:nvPr>
+        </p:nvSpPr>
+        <p:spPr>
+          <a:xfrm xmlns:a="http://schemas.openxmlformats.org/drawingml/2006/main">
+            <a:off x="685800" y="1905000"/>
+            <a:ext cx="5029200" cy="4267200"/>
+          </a:xfrm>
+          <a:prstGeom xmlns:a="http://schemas.openxmlformats.org/drawingml/2006/main" prst="rect">
+            <a:avLst/>
+          </a:prstGeom>
+          <a:noFill xmlns:a="http://schemas.openxmlformats.org/drawingml/2006/main"/>
+          <a:ln xmlns:a="http://schemas.openxmlformats.org/drawingml/2006/main">
+            <a:noFill/>
+            <a:prstDash val="solid"/>
+          </a:ln>
+        </p:spPr>
+        <p:txBody>
+          <a:bodyPr xmlns:a="http://schemas.openxmlformats.org/drawingml/2006/main" wrap="square" lIns="0" tIns="0" rIns="0" bIns="0" anchor="t">
+            <a:normAutofit/>
+          </a:bodyPr>
+          <a:lstStyle xmlns:a="http://schemas.openxmlformats.org/drawingml/2006/main">
+            <a:defPPr algn="l">
+              <a:defRPr sz="2250" b="0">
+                <a:solidFill>
+                  <a:schemeClr val="tx1"/>
+                </a:solidFill>
+                <a:latin typeface="+mn-lt"/>
+                <a:ea typeface="+mn-lt"/>
+                <a:cs typeface="+mn-lt"/>
+              </a:defRPr>
+            </a:defPPr>
+            <a:lvl1pPr marL="228600" indent="-228600">
+              <a:lnSpc>
+                <a:spcPct val="110000"/>
+              </a:lnSpc>
+              <a:spcBef>
+                <a:spcPts val="0"/>
+              </a:spcBef>
+              <a:spcAft>
+                <a:spcPts val="1200"/>
+              </a:spcAft>
+              <a:buChar char="•"/>
+            </a:lvl1pPr>
+            <a:lvl2pPr marL="533400" indent="-228600">
+              <a:lnSpc>
+                <a:spcPct val="110000"/>
+              </a:lnSpc>
+              <a:spcBef>
+                <a:spcPts val="0"/>
+              </a:spcBef>
+              <a:spcAft>
+                <a:spcPts val="1200"/>
+              </a:spcAft>
+              <a:buChar char="•"/>
+            </a:lvl2pPr>
+            <a:lvl3pPr marL="838200" indent="-228600">
+              <a:lnSpc>
+                <a:spcPct val="110000"/>
+              </a:lnSpc>
+              <a:spcBef>
+                <a:spcPts val="0"/>
+              </a:spcBef>
+              <a:spcAft>
+                <a:spcPts val="1200"/>
+              </a:spcAft>
+              <a:buChar char="•"/>
+            </a:lvl3pPr>
+            <a:lvl4pPr marL="1143000" indent="-228600">
+              <a:lnSpc>
+                <a:spcPct val="110000"/>
+              </a:lnSpc>
+              <a:spcBef>
+                <a:spcPts val="0"/>
+              </a:spcBef>
+              <a:spcAft>
+                <a:spcPts val="1200"/>
+              </a:spcAft>
+              <a:buChar char="•"/>
+            </a:lvl4pPr>
+            <a:lvl5pPr marL="1447800" indent="-228600">
+              <a:lnSpc>
+                <a:spcPct val="110000"/>
+              </a:lnSpc>
+              <a:spcBef>
+                <a:spcPts val="0"/>
+              </a:spcBef>
+              <a:spcAft>
+                <a:spcPts val="1200"/>
+              </a:spcAft>
+              <a:buChar char="•"/>
+            </a:lvl5pPr>
+            <a:lvl6pPr marL="1752600" indent="-228600">
+              <a:lnSpc>
+                <a:spcPct val="110000"/>
+              </a:lnSpc>
+              <a:spcBef>
+                <a:spcPts val="0"/>
+              </a:spcBef>
+              <a:spcAft>
+                <a:spcPts val="1200"/>
+              </a:spcAft>
+              <a:buChar char="•"/>
+            </a:lvl6pPr>
+            <a:lvl7pPr marL="2057400" indent="-228600">
+              <a:lnSpc>
+                <a:spcPct val="110000"/>
+              </a:lnSpc>
+              <a:spcBef>
+                <a:spcPts val="0"/>
+              </a:spcBef>
+              <a:spcAft>
+                <a:spcPts val="1200"/>
+              </a:spcAft>
+              <a:buChar char="•"/>
+            </a:lvl7pPr>
+            <a:lvl8pPr marL="2362200" indent="-228600">
+              <a:lnSpc>
+                <a:spcPct val="110000"/>
+              </a:lnSpc>
+              <a:spcBef>
+                <a:spcPts val="0"/>
+              </a:spcBef>
+              <a:spcAft>
+                <a:spcPts val="1200"/>
+              </a:spcAft>
+              <a:buChar char="•"/>
+            </a:lvl8pPr>
+            <a:lvl9pPr marL="2667000" indent="-228600">
+              <a:lnSpc>
+                <a:spcPct val="110000"/>
+              </a:lnSpc>
+              <a:spcBef>
+                <a:spcPts val="0"/>
+              </a:spcBef>
+              <a:spcAft>
+                <a:spcPts val="1200"/>
+              </a:spcAft>
+              <a:buChar char="•"/>
+            </a:lvl9pPr>
+          </a:lstStyle>
+          <a:p xmlns:a="http://schemas.openxmlformats.org/drawingml/2006/main"/>
+        </p:txBody>
+      </p:sp>
+    </p:spTree>
+  </p:cSld>
+</p:sldLayout>
+</file>
+
+<file path=ppt/slideLayouts/slideLayout6.xml><?xml version="1.0" encoding="utf-8"?>
+<p:sldLayout xmlns:p="http://schemas.openxmlformats.org/presentationml/2006/main" type="blank">
+  <p:cSld name="Blank">
+    <p:spTree>
+      <p:nvGrpSpPr>
+        <p:cNvPr id="1" name=""/>
+        <p:cNvGrpSpPr/>
+        <p:nvPr/>
+      </p:nvGrpSpPr>
+      <p:grpSpPr>
+        <a:xfrm xmlns:a="http://schemas.openxmlformats.org/drawingml/2006/main"/>
+      </p:grpSpPr>
     </p:spTree>
   </p:cSld>
 </p:sldLayout>
@@ -895,7 +2550,12 @@
   </p:cSld>
   <p:clrMap bg1="lt1" tx1="dk1" bg2="lt2" tx2="dk2" accent1="accent1" accent2="accent2" accent3="accent3" accent4="accent4" accent5="accent5" accent6="accent6" hlink="hlink" folHlink="folHlink"/>
   <p:sldLayoutIdLst>
-    <p:sldLayoutId xmlns:r="http://schemas.openxmlformats.org/officeDocument/2006/relationships" id="2147483649" r:id="Ra34f6337fec44833"/>
+    <p:sldLayoutId xmlns:r="http://schemas.openxmlformats.org/officeDocument/2006/relationships" id="2147483649" r:id="Rf5160fc1211b47e0"/>
+    <p:sldLayoutId xmlns:r="http://schemas.openxmlformats.org/officeDocument/2006/relationships" id="2147483650" r:id="R6c9a84d0a22d4797"/>
+    <p:sldLayoutId xmlns:r="http://schemas.openxmlformats.org/officeDocument/2006/relationships" id="2147483651" r:id="R1a927cc0df574cd6"/>
+    <p:sldLayoutId xmlns:r="http://schemas.openxmlformats.org/officeDocument/2006/relationships" id="2147483652" r:id="R4d7df6e1771944ad"/>
+    <p:sldLayoutId xmlns:r="http://schemas.openxmlformats.org/officeDocument/2006/relationships" id="2147483653" r:id="R351fd73af4394e99"/>
+    <p:sldLayoutId xmlns:r="http://schemas.openxmlformats.org/officeDocument/2006/relationships" id="2147483654" r:id="Rc2636b967e4b4481"/>
   </p:sldLayoutIdLst>
   <p:txStyles>
     <p:titleStyle>
@@ -1218,16 +2878,16 @@
         <a:srgbClr val="96607D"/>
       </a:folHlink>
     </a:clrScheme>
-    <a:fontScheme name="Office">
+    <a:fontScheme name="">
       <a:majorFont>
-        <a:latin typeface="Calibri Light"/>
-        <a:ea typeface="Calibri Light"/>
-        <a:cs typeface="Calibri Light"/>
+        <a:latin typeface="Aptos"/>
+        <a:ea typeface=""/>
+        <a:cs typeface=""/>
       </a:majorFont>
       <a:minorFont>
-        <a:latin typeface="Calibri"/>
-        <a:ea typeface="Calibri"/>
-        <a:cs typeface="Calibri"/>
+        <a:latin typeface="Aptos"/>
+        <a:ea typeface=""/>
+        <a:cs typeface=""/>
       </a:minorFont>
     </a:fontScheme>
     <a:fmtScheme name="ChatGPT">
@@ -1446,7 +3106,7 @@
           <p:cNvPr id="5" name="">
             <a:extLst xmlns:a="http://schemas.openxmlformats.org/drawingml/2006/main">
               <a:ext uri="{FF2B5EF4-FFF2-40B4-BE49-F238E27FC236}">
-                <a16:creationId xmlns:a16="http://schemas.microsoft.com/office/drawing/2014/main" id="{724F0B40-3538-4ECC-8125-4C206FC036C3}"/>
+                <a16:creationId xmlns:a16="http://schemas.microsoft.com/office/drawing/2014/main" id="{C569F264-C943-4FC3-8A38-AC993CBF8300}"/>
               </a:ext>
             </a:extLst>
           </p:cNvPr>
@@ -1472,7 +3132,18 @@
           <a:bodyPr xmlns:a="http://schemas.openxmlformats.org/drawingml/2006/main" anchor="ctr">
             <a:noAutofit/>
           </a:bodyPr>
-          <a:lstStyle xmlns:a="http://schemas.openxmlformats.org/drawingml/2006/main"/>
+          <a:lstStyle xmlns:a="http://schemas.openxmlformats.org/drawingml/2006/main">
+            <a:defPPr algn="l">
+              <a:defRPr sz="2700" b="1">
+                <a:solidFill>
+                  <a:srgbClr val="161616"/>
+                </a:solidFill>
+                <a:latin typeface="Arial"/>
+                <a:ea typeface="Arial"/>
+                <a:cs typeface="Arial"/>
+              </a:defRPr>
+            </a:defPPr>
+          </a:lstStyle>
           <a:p xmlns:a="http://schemas.openxmlformats.org/drawingml/2006/main">
             <a:pPr algn="l">
               <a:defRPr sz="2700" b="1">
@@ -1503,7 +3174,7 @@
           <p:cNvPr id="2" name="">
             <a:extLst xmlns:a="http://schemas.openxmlformats.org/drawingml/2006/main">
               <a:ext uri="{FF2B5EF4-FFF2-40B4-BE49-F238E27FC236}">
-                <a16:creationId xmlns:a16="http://schemas.microsoft.com/office/drawing/2014/main" id="{BC32D819-3F49-49CE-9E67-5CD54475EE81}"/>
+                <a16:creationId xmlns:a16="http://schemas.microsoft.com/office/drawing/2014/main" id="{4EC56200-3F34-45BB-8D6B-E20007B1915D}"/>
               </a:ext>
             </a:extLst>
           </p:cNvPr>
@@ -1529,7 +3200,18 @@
           <a:bodyPr xmlns:a="http://schemas.openxmlformats.org/drawingml/2006/main">
             <a:noAutofit/>
           </a:bodyPr>
-          <a:lstStyle xmlns:a="http://schemas.openxmlformats.org/drawingml/2006/main"/>
+          <a:lstStyle xmlns:a="http://schemas.openxmlformats.org/drawingml/2006/main">
+            <a:defPPr>
+              <a:defRPr sz="3750" b="1">
+                <a:solidFill>
+                  <a:srgbClr val="161616"/>
+                </a:solidFill>
+                <a:latin typeface="Arial"/>
+                <a:ea typeface="Arial"/>
+                <a:cs typeface="Arial"/>
+              </a:defRPr>
+            </a:defPPr>
+          </a:lstStyle>
           <a:p xmlns:a="http://schemas.openxmlformats.org/drawingml/2006/main">
             <a:pPr>
               <a:defRPr sz="3750" b="1">
@@ -1560,7 +3242,7 @@
           <p:cNvPr id="3" name="">
             <a:extLst xmlns:a="http://schemas.openxmlformats.org/drawingml/2006/main">
               <a:ext uri="{FF2B5EF4-FFF2-40B4-BE49-F238E27FC236}">
-                <a16:creationId xmlns:a16="http://schemas.microsoft.com/office/drawing/2014/main" id="{67D0C964-39D0-4942-A333-87DD2D6CDBE4}"/>
+                <a16:creationId xmlns:a16="http://schemas.microsoft.com/office/drawing/2014/main" id="{70C57CBA-502E-4060-A949-CD18A0C48E1E}"/>
               </a:ext>
             </a:extLst>
           </p:cNvPr>
@@ -1586,7 +3268,18 @@
           <a:bodyPr xmlns:a="http://schemas.openxmlformats.org/drawingml/2006/main">
             <a:noAutofit/>
           </a:bodyPr>
-          <a:lstStyle xmlns:a="http://schemas.openxmlformats.org/drawingml/2006/main"/>
+          <a:lstStyle xmlns:a="http://schemas.openxmlformats.org/drawingml/2006/main">
+            <a:defPPr>
+              <a:defRPr sz="2250" b="0">
+                <a:solidFill>
+                  <a:srgbClr val="161616"/>
+                </a:solidFill>
+                <a:latin typeface="Arial"/>
+                <a:ea typeface="Arial"/>
+                <a:cs typeface="Arial"/>
+              </a:defRPr>
+            </a:defPPr>
+          </a:lstStyle>
           <a:p xmlns:a="http://schemas.openxmlformats.org/drawingml/2006/main">
             <a:pPr>
               <a:defRPr sz="2250" b="0">
@@ -1617,7 +3310,7 @@
           <p:cNvPr id="4" name="">
             <a:extLst xmlns:a="http://schemas.openxmlformats.org/drawingml/2006/main">
               <a:ext uri="{FF2B5EF4-FFF2-40B4-BE49-F238E27FC236}">
-                <a16:creationId xmlns:a16="http://schemas.microsoft.com/office/drawing/2014/main" id="{E168A325-9184-4C73-B378-F870F0A4776F}"/>
+                <a16:creationId xmlns:a16="http://schemas.microsoft.com/office/drawing/2014/main" id="{CA9C823C-946B-4326-B2F3-23F2E89A1301}"/>
               </a:ext>
             </a:extLst>
           </p:cNvPr>
@@ -1643,7 +3336,18 @@
           <a:bodyPr xmlns:a="http://schemas.openxmlformats.org/drawingml/2006/main">
             <a:noAutofit/>
           </a:bodyPr>
-          <a:lstStyle xmlns:a="http://schemas.openxmlformats.org/drawingml/2006/main"/>
+          <a:lstStyle xmlns:a="http://schemas.openxmlformats.org/drawingml/2006/main">
+            <a:defPPr>
+              <a:defRPr sz="1800" b="0">
+                <a:solidFill>
+                  <a:srgbClr val="161616"/>
+                </a:solidFill>
+                <a:latin typeface="Arial"/>
+                <a:ea typeface="Arial"/>
+                <a:cs typeface="Arial"/>
+              </a:defRPr>
+            </a:defPPr>
+          </a:lstStyle>
           <a:p xmlns:a="http://schemas.openxmlformats.org/drawingml/2006/main">
             <a:pPr>
               <a:defRPr sz="1800" b="0">
@@ -1695,7 +3399,7 @@
     </p:spTree>
     <p:extLst>
       <p:ext uri="{BB962C8B-B14F-4D97-AF65-F5344CB8AC3E}">
-        <p14:creationId xmlns:p14="http://schemas.microsoft.com/office/powerpoint/2010/main" val="954362305"/>
+        <p14:creationId xmlns:p14="http://schemas.microsoft.com/office/powerpoint/2010/main" val="205357372"/>
       </p:ext>
     </p:extLst>
   </p:cSld>
@@ -1726,7 +3430,7 @@
           <p:cNvPr id="3" name="">
             <a:extLst xmlns:a="http://schemas.openxmlformats.org/drawingml/2006/main">
               <a:ext uri="{FF2B5EF4-FFF2-40B4-BE49-F238E27FC236}">
-                <a16:creationId xmlns:a16="http://schemas.microsoft.com/office/drawing/2014/main" id="{58EAE1F3-6C87-4A9A-B83C-7393EA56CB26}"/>
+                <a16:creationId xmlns:a16="http://schemas.microsoft.com/office/drawing/2014/main" id="{2DAC5281-D3B7-4555-9549-2BCC65746E38}"/>
               </a:ext>
             </a:extLst>
           </p:cNvPr>
@@ -1752,7 +3456,18 @@
           <a:bodyPr xmlns:a="http://schemas.openxmlformats.org/drawingml/2006/main" anchor="ctr">
             <a:noAutofit/>
           </a:bodyPr>
-          <a:lstStyle xmlns:a="http://schemas.openxmlformats.org/drawingml/2006/main"/>
+          <a:lstStyle xmlns:a="http://schemas.openxmlformats.org/drawingml/2006/main">
+            <a:defPPr algn="l">
+              <a:defRPr sz="2700" b="1">
+                <a:solidFill>
+                  <a:srgbClr val="161616"/>
+                </a:solidFill>
+                <a:latin typeface="Arial"/>
+                <a:ea typeface="Arial"/>
+                <a:cs typeface="Arial"/>
+              </a:defRPr>
+            </a:defPPr>
+          </a:lstStyle>
           <a:p xmlns:a="http://schemas.openxmlformats.org/drawingml/2006/main">
             <a:pPr algn="l">
               <a:defRPr sz="2700" b="1">
@@ -1780,20 +3495,26 @@
       </p:sp>
       <p:pic>
         <p:nvPicPr>
-          <p:cNvPr id="4" name=""/>
+          <p:cNvPr id="2" name="">
+            <a:extLst xmlns:a="http://schemas.openxmlformats.org/drawingml/2006/main">
+              <a:ext uri="{FF2B5EF4-FFF2-40B4-BE49-F238E27FC236}">
+                <a16:creationId xmlns:a16="http://schemas.microsoft.com/office/drawing/2014/main" id="{F2189551-4DA8-42DB-A9EC-F4827AF71B06}"/>
+              </a:ext>
+            </a:extLst>
+          </p:cNvPr>
           <p:cNvPicPr>
             <a:picLocks xmlns:a="http://schemas.openxmlformats.org/drawingml/2006/main" noChangeAspect="1"/>
           </p:cNvPicPr>
           <p:nvPr/>
         </p:nvPicPr>
         <p:blipFill>
-          <a:blip xmlns:r="http://schemas.openxmlformats.org/officeDocument/2006/relationships" xmlns:a="http://schemas.openxmlformats.org/drawingml/2006/main" r:embed="R4a65d5ca2db04524"/>
+          <a:blip xmlns:r="http://schemas.openxmlformats.org/officeDocument/2006/relationships" xmlns:a="http://schemas.openxmlformats.org/drawingml/2006/main" r:embed="R667282d07e494fc5"/>
           <a:stretch xmlns:a="http://schemas.openxmlformats.org/drawingml/2006/main"/>
         </p:blipFill>
         <p:spPr>
           <a:xfrm xmlns:a="http://schemas.openxmlformats.org/drawingml/2006/main">
-            <a:off x="2527766" y="1285875"/>
-            <a:ext cx="7136468" cy="5000625"/>
+            <a:off x="1614006" y="1285875"/>
+            <a:ext cx="8963988" cy="5000625"/>
           </a:xfrm>
           <a:prstGeom xmlns:a="http://schemas.openxmlformats.org/drawingml/2006/main" prst="rect">
             <a:avLst/>
@@ -1803,7 +3524,7 @@
     </p:spTree>
     <p:extLst>
       <p:ext uri="{BB962C8B-B14F-4D97-AF65-F5344CB8AC3E}">
-        <p14:creationId xmlns:p14="http://schemas.microsoft.com/office/powerpoint/2010/main" val="1776792759"/>
+        <p14:creationId xmlns:p14="http://schemas.microsoft.com/office/powerpoint/2010/main" val="69330226"/>
       </p:ext>
     </p:extLst>
   </p:cSld>
@@ -1834,7 +3555,7 @@
           <p:cNvPr id="3" name="">
             <a:extLst xmlns:a="http://schemas.openxmlformats.org/drawingml/2006/main">
               <a:ext uri="{FF2B5EF4-FFF2-40B4-BE49-F238E27FC236}">
-                <a16:creationId xmlns:a16="http://schemas.microsoft.com/office/drawing/2014/main" id="{EDDE5C77-F7D0-4ED4-84F0-23966DC3FCF8}"/>
+                <a16:creationId xmlns:a16="http://schemas.microsoft.com/office/drawing/2014/main" id="{04BCC966-9692-46D7-ACF4-CE0798E19F32}"/>
               </a:ext>
             </a:extLst>
           </p:cNvPr>
@@ -1860,7 +3581,18 @@
           <a:bodyPr xmlns:a="http://schemas.openxmlformats.org/drawingml/2006/main" anchor="ctr">
             <a:noAutofit/>
           </a:bodyPr>
-          <a:lstStyle xmlns:a="http://schemas.openxmlformats.org/drawingml/2006/main"/>
+          <a:lstStyle xmlns:a="http://schemas.openxmlformats.org/drawingml/2006/main">
+            <a:defPPr algn="l">
+              <a:defRPr sz="2700" b="1">
+                <a:solidFill>
+                  <a:srgbClr val="161616"/>
+                </a:solidFill>
+                <a:latin typeface="Arial"/>
+                <a:ea typeface="Arial"/>
+                <a:cs typeface="Arial"/>
+              </a:defRPr>
+            </a:defPPr>
+          </a:lstStyle>
           <a:p xmlns:a="http://schemas.openxmlformats.org/drawingml/2006/main">
             <a:pPr algn="l">
               <a:defRPr sz="2700" b="1">
@@ -1888,7 +3620,13 @@
       </p:sp>
       <p:graphicFrame>
         <p:nvGraphicFramePr>
-          <p:cNvPr id="4" name=""/>
+          <p:cNvPr id="2" name="">
+            <a:extLst xmlns:a="http://schemas.openxmlformats.org/drawingml/2006/main">
+              <a:ext uri="{FF2B5EF4-FFF2-40B4-BE49-F238E27FC236}">
+                <a16:creationId xmlns:a16="http://schemas.microsoft.com/office/drawing/2014/main" id="{64F4E754-0E17-4F88-A07A-1E3B8109E9B4}"/>
+              </a:ext>
+            </a:extLst>
+          </p:cNvPr>
           <p:cNvGraphicFramePr/>
           <p:nvPr/>
         </p:nvGraphicFramePr>
@@ -1924,6 +3662,30 @@
                     </a:p>
                   </a:txBody>
                   <a:tcPr marL="91440" marR="91440" marT="45720" marB="45720">
+                    <a:lnL w="9525">
+                      <a:solidFill>
+                        <a:srgbClr val="888888"/>
+                      </a:solidFill>
+                      <a:prstDash val="solid"/>
+                    </a:lnL>
+                    <a:lnR w="9525">
+                      <a:solidFill>
+                        <a:srgbClr val="888888"/>
+                      </a:solidFill>
+                      <a:prstDash val="solid"/>
+                    </a:lnR>
+                    <a:lnT w="9525">
+                      <a:solidFill>
+                        <a:srgbClr val="888888"/>
+                      </a:solidFill>
+                      <a:prstDash val="solid"/>
+                    </a:lnT>
+                    <a:lnB w="9525">
+                      <a:solidFill>
+                        <a:srgbClr val="888888"/>
+                      </a:solidFill>
+                      <a:prstDash val="solid"/>
+                    </a:lnB>
                     <a:solidFill>
                       <a:srgbClr val="F1F1F1"/>
                     </a:solidFill>
@@ -1948,6 +3710,24 @@
                     </a:p>
                   </a:txBody>
                   <a:tcPr marL="91440" marR="91440" marT="45720" marB="45720">
+                    <a:lnR w="9525">
+                      <a:solidFill>
+                        <a:srgbClr val="888888"/>
+                      </a:solidFill>
+                      <a:prstDash val="solid"/>
+                    </a:lnR>
+                    <a:lnT w="9525">
+                      <a:solidFill>
+                        <a:srgbClr val="888888"/>
+                      </a:solidFill>
+                      <a:prstDash val="solid"/>
+                    </a:lnT>
+                    <a:lnB w="9525">
+                      <a:solidFill>
+                        <a:srgbClr val="888888"/>
+                      </a:solidFill>
+                      <a:prstDash val="solid"/>
+                    </a:lnB>
                     <a:solidFill>
                       <a:srgbClr val="F1F1F1"/>
                     </a:solidFill>
@@ -1974,6 +3754,24 @@
                     </a:p>
                   </a:txBody>
                   <a:tcPr marL="91440" marR="91440" marT="45720" marB="45720">
+                    <a:lnL w="9525">
+                      <a:solidFill>
+                        <a:srgbClr val="888888"/>
+                      </a:solidFill>
+                      <a:prstDash val="solid"/>
+                    </a:lnL>
+                    <a:lnR w="9525">
+                      <a:solidFill>
+                        <a:srgbClr val="888888"/>
+                      </a:solidFill>
+                      <a:prstDash val="solid"/>
+                    </a:lnR>
+                    <a:lnB w="9525">
+                      <a:solidFill>
+                        <a:srgbClr val="888888"/>
+                      </a:solidFill>
+                      <a:prstDash val="solid"/>
+                    </a:lnB>
                     <a:solidFill>
                       <a:srgbClr val="FFFFFF"/>
                     </a:solidFill>
@@ -1998,6 +3796,18 @@
                     </a:p>
                   </a:txBody>
                   <a:tcPr marL="91440" marR="91440" marT="45720" marB="45720">
+                    <a:lnR w="9525">
+                      <a:solidFill>
+                        <a:srgbClr val="888888"/>
+                      </a:solidFill>
+                      <a:prstDash val="solid"/>
+                    </a:lnR>
+                    <a:lnB w="9525">
+                      <a:solidFill>
+                        <a:srgbClr val="888888"/>
+                      </a:solidFill>
+                      <a:prstDash val="solid"/>
+                    </a:lnB>
                     <a:solidFill>
                       <a:srgbClr val="FFFFFF"/>
                     </a:solidFill>
@@ -2024,6 +3834,24 @@
                     </a:p>
                   </a:txBody>
                   <a:tcPr marL="91440" marR="91440" marT="45720" marB="45720">
+                    <a:lnL w="9525">
+                      <a:solidFill>
+                        <a:srgbClr val="888888"/>
+                      </a:solidFill>
+                      <a:prstDash val="solid"/>
+                    </a:lnL>
+                    <a:lnR w="9525">
+                      <a:solidFill>
+                        <a:srgbClr val="888888"/>
+                      </a:solidFill>
+                      <a:prstDash val="solid"/>
+                    </a:lnR>
+                    <a:lnB w="9525">
+                      <a:solidFill>
+                        <a:srgbClr val="888888"/>
+                      </a:solidFill>
+                      <a:prstDash val="solid"/>
+                    </a:lnB>
                     <a:solidFill>
                       <a:srgbClr val="FFFFFF"/>
                     </a:solidFill>
@@ -2048,6 +3876,18 @@
                     </a:p>
                   </a:txBody>
                   <a:tcPr marL="91440" marR="91440" marT="45720" marB="45720">
+                    <a:lnR w="9525">
+                      <a:solidFill>
+                        <a:srgbClr val="888888"/>
+                      </a:solidFill>
+                      <a:prstDash val="solid"/>
+                    </a:lnR>
+                    <a:lnB w="9525">
+                      <a:solidFill>
+                        <a:srgbClr val="888888"/>
+                      </a:solidFill>
+                      <a:prstDash val="solid"/>
+                    </a:lnB>
                     <a:solidFill>
                       <a:srgbClr val="FFFFFF"/>
                     </a:solidFill>
@@ -2074,6 +3914,24 @@
                     </a:p>
                   </a:txBody>
                   <a:tcPr marL="91440" marR="91440" marT="45720" marB="45720">
+                    <a:lnL w="9525">
+                      <a:solidFill>
+                        <a:srgbClr val="888888"/>
+                      </a:solidFill>
+                      <a:prstDash val="solid"/>
+                    </a:lnL>
+                    <a:lnR w="9525">
+                      <a:solidFill>
+                        <a:srgbClr val="888888"/>
+                      </a:solidFill>
+                      <a:prstDash val="solid"/>
+                    </a:lnR>
+                    <a:lnB w="9525">
+                      <a:solidFill>
+                        <a:srgbClr val="888888"/>
+                      </a:solidFill>
+                      <a:prstDash val="solid"/>
+                    </a:lnB>
                     <a:solidFill>
                       <a:srgbClr val="FFFFFF"/>
                     </a:solidFill>
@@ -2098,6 +3956,18 @@
                     </a:p>
                   </a:txBody>
                   <a:tcPr marL="91440" marR="91440" marT="45720" marB="45720">
+                    <a:lnR w="9525">
+                      <a:solidFill>
+                        <a:srgbClr val="888888"/>
+                      </a:solidFill>
+                      <a:prstDash val="solid"/>
+                    </a:lnR>
+                    <a:lnB w="9525">
+                      <a:solidFill>
+                        <a:srgbClr val="888888"/>
+                      </a:solidFill>
+                      <a:prstDash val="solid"/>
+                    </a:lnB>
                     <a:solidFill>
                       <a:srgbClr val="FFFFFF"/>
                     </a:solidFill>
@@ -2124,6 +3994,24 @@
                     </a:p>
                   </a:txBody>
                   <a:tcPr marL="91440" marR="91440" marT="45720" marB="45720">
+                    <a:lnL w="9525">
+                      <a:solidFill>
+                        <a:srgbClr val="888888"/>
+                      </a:solidFill>
+                      <a:prstDash val="solid"/>
+                    </a:lnL>
+                    <a:lnR w="9525">
+                      <a:solidFill>
+                        <a:srgbClr val="888888"/>
+                      </a:solidFill>
+                      <a:prstDash val="solid"/>
+                    </a:lnR>
+                    <a:lnB w="9525">
+                      <a:solidFill>
+                        <a:srgbClr val="888888"/>
+                      </a:solidFill>
+                      <a:prstDash val="solid"/>
+                    </a:lnB>
                     <a:solidFill>
                       <a:srgbClr val="FFFFFF"/>
                     </a:solidFill>
@@ -2148,6 +4036,18 @@
                     </a:p>
                   </a:txBody>
                   <a:tcPr marL="91440" marR="91440" marT="45720" marB="45720">
+                    <a:lnR w="9525">
+                      <a:solidFill>
+                        <a:srgbClr val="888888"/>
+                      </a:solidFill>
+                      <a:prstDash val="solid"/>
+                    </a:lnR>
+                    <a:lnB w="9525">
+                      <a:solidFill>
+                        <a:srgbClr val="888888"/>
+                      </a:solidFill>
+                      <a:prstDash val="solid"/>
+                    </a:lnB>
                     <a:solidFill>
                       <a:srgbClr val="FFFFFF"/>
                     </a:solidFill>
@@ -2174,6 +4074,24 @@
                     </a:p>
                   </a:txBody>
                   <a:tcPr marL="91440" marR="91440" marT="45720" marB="45720">
+                    <a:lnL w="9525">
+                      <a:solidFill>
+                        <a:srgbClr val="888888"/>
+                      </a:solidFill>
+                      <a:prstDash val="solid"/>
+                    </a:lnL>
+                    <a:lnR w="9525">
+                      <a:solidFill>
+                        <a:srgbClr val="888888"/>
+                      </a:solidFill>
+                      <a:prstDash val="solid"/>
+                    </a:lnR>
+                    <a:lnB w="9525">
+                      <a:solidFill>
+                        <a:srgbClr val="888888"/>
+                      </a:solidFill>
+                      <a:prstDash val="solid"/>
+                    </a:lnB>
                     <a:solidFill>
                       <a:srgbClr val="FFFFFF"/>
                     </a:solidFill>
@@ -2198,6 +4116,18 @@
                     </a:p>
                   </a:txBody>
                   <a:tcPr marL="91440" marR="91440" marT="45720" marB="45720">
+                    <a:lnR w="9525">
+                      <a:solidFill>
+                        <a:srgbClr val="888888"/>
+                      </a:solidFill>
+                      <a:prstDash val="solid"/>
+                    </a:lnR>
+                    <a:lnB w="9525">
+                      <a:solidFill>
+                        <a:srgbClr val="888888"/>
+                      </a:solidFill>
+                      <a:prstDash val="solid"/>
+                    </a:lnB>
                     <a:solidFill>
                       <a:srgbClr val="FFFFFF"/>
                     </a:solidFill>
@@ -2211,7 +4141,7 @@
     </p:spTree>
     <p:extLst>
       <p:ext uri="{BB962C8B-B14F-4D97-AF65-F5344CB8AC3E}">
-        <p14:creationId xmlns:p14="http://schemas.microsoft.com/office/powerpoint/2010/main" val="188394932"/>
+        <p14:creationId xmlns:p14="http://schemas.microsoft.com/office/powerpoint/2010/main" val="1395914165"/>
       </p:ext>
     </p:extLst>
   </p:cSld>
@@ -2242,7 +4172,7 @@
           <p:cNvPr id="3" name="">
             <a:extLst xmlns:a="http://schemas.openxmlformats.org/drawingml/2006/main">
               <a:ext uri="{FF2B5EF4-FFF2-40B4-BE49-F238E27FC236}">
-                <a16:creationId xmlns:a16="http://schemas.microsoft.com/office/drawing/2014/main" id="{03CB31A1-3002-4245-AB20-AC2E7275F195}"/>
+                <a16:creationId xmlns:a16="http://schemas.microsoft.com/office/drawing/2014/main" id="{8D194B3E-2CA2-4EE5-BE97-FCE834EA5703}"/>
               </a:ext>
             </a:extLst>
           </p:cNvPr>
@@ -2268,7 +4198,18 @@
           <a:bodyPr xmlns:a="http://schemas.openxmlformats.org/drawingml/2006/main" anchor="ctr">
             <a:noAutofit/>
           </a:bodyPr>
-          <a:lstStyle xmlns:a="http://schemas.openxmlformats.org/drawingml/2006/main"/>
+          <a:lstStyle xmlns:a="http://schemas.openxmlformats.org/drawingml/2006/main">
+            <a:defPPr algn="l">
+              <a:defRPr sz="2700" b="1">
+                <a:solidFill>
+                  <a:srgbClr val="161616"/>
+                </a:solidFill>
+                <a:latin typeface="Arial"/>
+                <a:ea typeface="Arial"/>
+                <a:cs typeface="Arial"/>
+              </a:defRPr>
+            </a:defPPr>
+          </a:lstStyle>
           <a:p xmlns:a="http://schemas.openxmlformats.org/drawingml/2006/main">
             <a:pPr algn="l">
               <a:defRPr sz="2700" b="1">
@@ -2296,7 +4237,13 @@
       </p:sp>
       <p:graphicFrame>
         <p:nvGraphicFramePr>
-          <p:cNvPr id="4" name=""/>
+          <p:cNvPr id="2" name="">
+            <a:extLst xmlns:a="http://schemas.openxmlformats.org/drawingml/2006/main">
+              <a:ext uri="{FF2B5EF4-FFF2-40B4-BE49-F238E27FC236}">
+                <a16:creationId xmlns:a16="http://schemas.microsoft.com/office/drawing/2014/main" id="{F0156461-FC72-4ECF-81DC-30C29B17DD34}"/>
+              </a:ext>
+            </a:extLst>
+          </p:cNvPr>
           <p:cNvGraphicFramePr/>
           <p:nvPr/>
         </p:nvGraphicFramePr>
@@ -2334,6 +4281,30 @@
                     </a:p>
                   </a:txBody>
                   <a:tcPr marL="91440" marR="91440" marT="45720" marB="45720">
+                    <a:lnL w="9525">
+                      <a:solidFill>
+                        <a:srgbClr val="888888"/>
+                      </a:solidFill>
+                      <a:prstDash val="solid"/>
+                    </a:lnL>
+                    <a:lnR w="9525">
+                      <a:solidFill>
+                        <a:srgbClr val="888888"/>
+                      </a:solidFill>
+                      <a:prstDash val="solid"/>
+                    </a:lnR>
+                    <a:lnT w="9525">
+                      <a:solidFill>
+                        <a:srgbClr val="888888"/>
+                      </a:solidFill>
+                      <a:prstDash val="solid"/>
+                    </a:lnT>
+                    <a:lnB w="9525">
+                      <a:solidFill>
+                        <a:srgbClr val="888888"/>
+                      </a:solidFill>
+                      <a:prstDash val="solid"/>
+                    </a:lnB>
                     <a:solidFill>
                       <a:srgbClr val="F1F1F1"/>
                     </a:solidFill>
@@ -2358,6 +4329,24 @@
                     </a:p>
                   </a:txBody>
                   <a:tcPr marL="91440" marR="91440" marT="45720" marB="45720">
+                    <a:lnR w="9525">
+                      <a:solidFill>
+                        <a:srgbClr val="888888"/>
+                      </a:solidFill>
+                      <a:prstDash val="solid"/>
+                    </a:lnR>
+                    <a:lnT w="9525">
+                      <a:solidFill>
+                        <a:srgbClr val="888888"/>
+                      </a:solidFill>
+                      <a:prstDash val="solid"/>
+                    </a:lnT>
+                    <a:lnB w="9525">
+                      <a:solidFill>
+                        <a:srgbClr val="888888"/>
+                      </a:solidFill>
+                      <a:prstDash val="solid"/>
+                    </a:lnB>
                     <a:solidFill>
                       <a:srgbClr val="F1F1F1"/>
                     </a:solidFill>
@@ -2382,6 +4371,24 @@
                     </a:p>
                   </a:txBody>
                   <a:tcPr marL="91440" marR="91440" marT="45720" marB="45720">
+                    <a:lnR w="9525">
+                      <a:solidFill>
+                        <a:srgbClr val="888888"/>
+                      </a:solidFill>
+                      <a:prstDash val="solid"/>
+                    </a:lnR>
+                    <a:lnT w="9525">
+                      <a:solidFill>
+                        <a:srgbClr val="888888"/>
+                      </a:solidFill>
+                      <a:prstDash val="solid"/>
+                    </a:lnT>
+                    <a:lnB w="9525">
+                      <a:solidFill>
+                        <a:srgbClr val="888888"/>
+                      </a:solidFill>
+                      <a:prstDash val="solid"/>
+                    </a:lnB>
                     <a:solidFill>
                       <a:srgbClr val="F1F1F1"/>
                     </a:solidFill>
@@ -2406,6 +4413,24 @@
                     </a:p>
                   </a:txBody>
                   <a:tcPr marL="91440" marR="91440" marT="45720" marB="45720">
+                    <a:lnR w="9525">
+                      <a:solidFill>
+                        <a:srgbClr val="888888"/>
+                      </a:solidFill>
+                      <a:prstDash val="solid"/>
+                    </a:lnR>
+                    <a:lnT w="9525">
+                      <a:solidFill>
+                        <a:srgbClr val="888888"/>
+                      </a:solidFill>
+                      <a:prstDash val="solid"/>
+                    </a:lnT>
+                    <a:lnB w="9525">
+                      <a:solidFill>
+                        <a:srgbClr val="888888"/>
+                      </a:solidFill>
+                      <a:prstDash val="solid"/>
+                    </a:lnB>
                     <a:solidFill>
                       <a:srgbClr val="F1F1F1"/>
                     </a:solidFill>
@@ -2432,6 +4457,24 @@
                     </a:p>
                   </a:txBody>
                   <a:tcPr marL="91440" marR="91440" marT="45720" marB="45720">
+                    <a:lnL w="9525">
+                      <a:solidFill>
+                        <a:srgbClr val="888888"/>
+                      </a:solidFill>
+                      <a:prstDash val="solid"/>
+                    </a:lnL>
+                    <a:lnR w="9525">
+                      <a:solidFill>
+                        <a:srgbClr val="888888"/>
+                      </a:solidFill>
+                      <a:prstDash val="solid"/>
+                    </a:lnR>
+                    <a:lnB w="9525">
+                      <a:solidFill>
+                        <a:srgbClr val="888888"/>
+                      </a:solidFill>
+                      <a:prstDash val="solid"/>
+                    </a:lnB>
                     <a:solidFill>
                       <a:srgbClr val="FFFFFF"/>
                     </a:solidFill>
@@ -2456,6 +4499,18 @@
                     </a:p>
                   </a:txBody>
                   <a:tcPr marL="91440" marR="91440" marT="45720" marB="45720">
+                    <a:lnR w="9525">
+                      <a:solidFill>
+                        <a:srgbClr val="888888"/>
+                      </a:solidFill>
+                      <a:prstDash val="solid"/>
+                    </a:lnR>
+                    <a:lnB w="9525">
+                      <a:solidFill>
+                        <a:srgbClr val="888888"/>
+                      </a:solidFill>
+                      <a:prstDash val="solid"/>
+                    </a:lnB>
                     <a:solidFill>
                       <a:srgbClr val="FFFFFF"/>
                     </a:solidFill>
@@ -2480,6 +4535,18 @@
                     </a:p>
                   </a:txBody>
                   <a:tcPr marL="91440" marR="91440" marT="45720" marB="45720">
+                    <a:lnR w="9525">
+                      <a:solidFill>
+                        <a:srgbClr val="888888"/>
+                      </a:solidFill>
+                      <a:prstDash val="solid"/>
+                    </a:lnR>
+                    <a:lnB w="9525">
+                      <a:solidFill>
+                        <a:srgbClr val="888888"/>
+                      </a:solidFill>
+                      <a:prstDash val="solid"/>
+                    </a:lnB>
                     <a:solidFill>
                       <a:srgbClr val="FFFFFF"/>
                     </a:solidFill>
@@ -2504,6 +4571,18 @@
                     </a:p>
                   </a:txBody>
                   <a:tcPr marL="91440" marR="91440" marT="45720" marB="45720">
+                    <a:lnR w="9525">
+                      <a:solidFill>
+                        <a:srgbClr val="888888"/>
+                      </a:solidFill>
+                      <a:prstDash val="solid"/>
+                    </a:lnR>
+                    <a:lnB w="9525">
+                      <a:solidFill>
+                        <a:srgbClr val="888888"/>
+                      </a:solidFill>
+                      <a:prstDash val="solid"/>
+                    </a:lnB>
                     <a:solidFill>
                       <a:srgbClr val="FFFFFF"/>
                     </a:solidFill>
@@ -2530,6 +4609,24 @@
                     </a:p>
                   </a:txBody>
                   <a:tcPr marL="91440" marR="91440" marT="45720" marB="45720">
+                    <a:lnL w="9525">
+                      <a:solidFill>
+                        <a:srgbClr val="888888"/>
+                      </a:solidFill>
+                      <a:prstDash val="solid"/>
+                    </a:lnL>
+                    <a:lnR w="9525">
+                      <a:solidFill>
+                        <a:srgbClr val="888888"/>
+                      </a:solidFill>
+                      <a:prstDash val="solid"/>
+                    </a:lnR>
+                    <a:lnB w="9525">
+                      <a:solidFill>
+                        <a:srgbClr val="888888"/>
+                      </a:solidFill>
+                      <a:prstDash val="solid"/>
+                    </a:lnB>
                     <a:solidFill>
                       <a:srgbClr val="FFFFFF"/>
                     </a:solidFill>
@@ -2554,6 +4651,18 @@
                     </a:p>
                   </a:txBody>
                   <a:tcPr marL="91440" marR="91440" marT="45720" marB="45720">
+                    <a:lnR w="9525">
+                      <a:solidFill>
+                        <a:srgbClr val="888888"/>
+                      </a:solidFill>
+                      <a:prstDash val="solid"/>
+                    </a:lnR>
+                    <a:lnB w="9525">
+                      <a:solidFill>
+                        <a:srgbClr val="888888"/>
+                      </a:solidFill>
+                      <a:prstDash val="solid"/>
+                    </a:lnB>
                     <a:solidFill>
                       <a:srgbClr val="FFFFFF"/>
                     </a:solidFill>
@@ -2578,6 +4687,18 @@
                     </a:p>
                   </a:txBody>
                   <a:tcPr marL="91440" marR="91440" marT="45720" marB="45720">
+                    <a:lnR w="9525">
+                      <a:solidFill>
+                        <a:srgbClr val="888888"/>
+                      </a:solidFill>
+                      <a:prstDash val="solid"/>
+                    </a:lnR>
+                    <a:lnB w="9525">
+                      <a:solidFill>
+                        <a:srgbClr val="888888"/>
+                      </a:solidFill>
+                      <a:prstDash val="solid"/>
+                    </a:lnB>
                     <a:solidFill>
                       <a:srgbClr val="FFFFFF"/>
                     </a:solidFill>
@@ -2602,6 +4723,18 @@
                     </a:p>
                   </a:txBody>
                   <a:tcPr marL="91440" marR="91440" marT="45720" marB="45720">
+                    <a:lnR w="9525">
+                      <a:solidFill>
+                        <a:srgbClr val="888888"/>
+                      </a:solidFill>
+                      <a:prstDash val="solid"/>
+                    </a:lnR>
+                    <a:lnB w="9525">
+                      <a:solidFill>
+                        <a:srgbClr val="888888"/>
+                      </a:solidFill>
+                      <a:prstDash val="solid"/>
+                    </a:lnB>
                     <a:solidFill>
                       <a:srgbClr val="FFFFFF"/>
                     </a:solidFill>
@@ -2628,6 +4761,24 @@
                     </a:p>
                   </a:txBody>
                   <a:tcPr marL="91440" marR="91440" marT="45720" marB="45720">
+                    <a:lnL w="9525">
+                      <a:solidFill>
+                        <a:srgbClr val="888888"/>
+                      </a:solidFill>
+                      <a:prstDash val="solid"/>
+                    </a:lnL>
+                    <a:lnR w="9525">
+                      <a:solidFill>
+                        <a:srgbClr val="888888"/>
+                      </a:solidFill>
+                      <a:prstDash val="solid"/>
+                    </a:lnR>
+                    <a:lnB w="9525">
+                      <a:solidFill>
+                        <a:srgbClr val="888888"/>
+                      </a:solidFill>
+                      <a:prstDash val="solid"/>
+                    </a:lnB>
                     <a:solidFill>
                       <a:srgbClr val="FFFFFF"/>
                     </a:solidFill>
@@ -2665,6 +4816,18 @@
                     </a:p>
                   </a:txBody>
                   <a:tcPr marL="91440" marR="91440" marT="45720" marB="45720">
+                    <a:lnR w="9525">
+                      <a:solidFill>
+                        <a:srgbClr val="888888"/>
+                      </a:solidFill>
+                      <a:prstDash val="solid"/>
+                    </a:lnR>
+                    <a:lnB w="9525">
+                      <a:solidFill>
+                        <a:srgbClr val="888888"/>
+                      </a:solidFill>
+                      <a:prstDash val="solid"/>
+                    </a:lnB>
                     <a:solidFill>
                       <a:srgbClr val="FFFFFF"/>
                     </a:solidFill>
@@ -2702,6 +4865,18 @@
                     </a:p>
                   </a:txBody>
                   <a:tcPr marL="91440" marR="91440" marT="45720" marB="45720">
+                    <a:lnR w="9525">
+                      <a:solidFill>
+                        <a:srgbClr val="888888"/>
+                      </a:solidFill>
+                      <a:prstDash val="solid"/>
+                    </a:lnR>
+                    <a:lnB w="9525">
+                      <a:solidFill>
+                        <a:srgbClr val="888888"/>
+                      </a:solidFill>
+                      <a:prstDash val="solid"/>
+                    </a:lnB>
                     <a:solidFill>
                       <a:srgbClr val="FFFFFF"/>
                     </a:solidFill>
@@ -2726,6 +4901,18 @@
                     </a:p>
                   </a:txBody>
                   <a:tcPr marL="91440" marR="91440" marT="45720" marB="45720">
+                    <a:lnR w="9525">
+                      <a:solidFill>
+                        <a:srgbClr val="888888"/>
+                      </a:solidFill>
+                      <a:prstDash val="solid"/>
+                    </a:lnR>
+                    <a:lnB w="9525">
+                      <a:solidFill>
+                        <a:srgbClr val="888888"/>
+                      </a:solidFill>
+                      <a:prstDash val="solid"/>
+                    </a:lnB>
                     <a:solidFill>
                       <a:srgbClr val="FFFFFF"/>
                     </a:solidFill>
@@ -2752,6 +4939,24 @@
                     </a:p>
                   </a:txBody>
                   <a:tcPr marL="91440" marR="91440" marT="45720" marB="45720">
+                    <a:lnL w="9525">
+                      <a:solidFill>
+                        <a:srgbClr val="888888"/>
+                      </a:solidFill>
+                      <a:prstDash val="solid"/>
+                    </a:lnL>
+                    <a:lnR w="9525">
+                      <a:solidFill>
+                        <a:srgbClr val="888888"/>
+                      </a:solidFill>
+                      <a:prstDash val="solid"/>
+                    </a:lnR>
+                    <a:lnB w="9525">
+                      <a:solidFill>
+                        <a:srgbClr val="888888"/>
+                      </a:solidFill>
+                      <a:prstDash val="solid"/>
+                    </a:lnB>
                     <a:solidFill>
                       <a:srgbClr val="FFFFFF"/>
                     </a:solidFill>
@@ -2776,6 +4981,18 @@
                     </a:p>
                   </a:txBody>
                   <a:tcPr marL="91440" marR="91440" marT="45720" marB="45720">
+                    <a:lnR w="9525">
+                      <a:solidFill>
+                        <a:srgbClr val="888888"/>
+                      </a:solidFill>
+                      <a:prstDash val="solid"/>
+                    </a:lnR>
+                    <a:lnB w="9525">
+                      <a:solidFill>
+                        <a:srgbClr val="888888"/>
+                      </a:solidFill>
+                      <a:prstDash val="solid"/>
+                    </a:lnB>
                     <a:solidFill>
                       <a:srgbClr val="FFFFFF"/>
                     </a:solidFill>
@@ -2800,6 +5017,18 @@
                     </a:p>
                   </a:txBody>
                   <a:tcPr marL="91440" marR="91440" marT="45720" marB="45720">
+                    <a:lnR w="9525">
+                      <a:solidFill>
+                        <a:srgbClr val="888888"/>
+                      </a:solidFill>
+                      <a:prstDash val="solid"/>
+                    </a:lnR>
+                    <a:lnB w="9525">
+                      <a:solidFill>
+                        <a:srgbClr val="888888"/>
+                      </a:solidFill>
+                      <a:prstDash val="solid"/>
+                    </a:lnB>
                     <a:solidFill>
                       <a:srgbClr val="FFFFFF"/>
                     </a:solidFill>
@@ -2824,6 +5053,18 @@
                     </a:p>
                   </a:txBody>
                   <a:tcPr marL="91440" marR="91440" marT="45720" marB="45720">
+                    <a:lnR w="9525">
+                      <a:solidFill>
+                        <a:srgbClr val="888888"/>
+                      </a:solidFill>
+                      <a:prstDash val="solid"/>
+                    </a:lnR>
+                    <a:lnB w="9525">
+                      <a:solidFill>
+                        <a:srgbClr val="888888"/>
+                      </a:solidFill>
+                      <a:prstDash val="solid"/>
+                    </a:lnB>
                     <a:solidFill>
                       <a:srgbClr val="FFFFFF"/>
                     </a:solidFill>
@@ -2837,7 +5078,7 @@
     </p:spTree>
     <p:extLst>
       <p:ext uri="{BB962C8B-B14F-4D97-AF65-F5344CB8AC3E}">
-        <p14:creationId xmlns:p14="http://schemas.microsoft.com/office/powerpoint/2010/main" val="2003403562"/>
+        <p14:creationId xmlns:p14="http://schemas.microsoft.com/office/powerpoint/2010/main" val="2036368475"/>
       </p:ext>
     </p:extLst>
   </p:cSld>
@@ -2868,7 +5109,7 @@
           <p:cNvPr id="3" name="">
             <a:extLst xmlns:a="http://schemas.openxmlformats.org/drawingml/2006/main">
               <a:ext uri="{FF2B5EF4-FFF2-40B4-BE49-F238E27FC236}">
-                <a16:creationId xmlns:a16="http://schemas.microsoft.com/office/drawing/2014/main" id="{D9664903-14B3-4774-BD12-E96EA1A94B0E}"/>
+                <a16:creationId xmlns:a16="http://schemas.microsoft.com/office/drawing/2014/main" id="{FFC0306B-CE39-4993-A745-13E7F6FC061D}"/>
               </a:ext>
             </a:extLst>
           </p:cNvPr>
@@ -2894,7 +5135,18 @@
           <a:bodyPr xmlns:a="http://schemas.openxmlformats.org/drawingml/2006/main" anchor="ctr">
             <a:noAutofit/>
           </a:bodyPr>
-          <a:lstStyle xmlns:a="http://schemas.openxmlformats.org/drawingml/2006/main"/>
+          <a:lstStyle xmlns:a="http://schemas.openxmlformats.org/drawingml/2006/main">
+            <a:defPPr algn="l">
+              <a:defRPr sz="2700" b="1">
+                <a:solidFill>
+                  <a:srgbClr val="161616"/>
+                </a:solidFill>
+                <a:latin typeface="Arial"/>
+                <a:ea typeface="Arial"/>
+                <a:cs typeface="Arial"/>
+              </a:defRPr>
+            </a:defPPr>
+          </a:lstStyle>
           <a:p xmlns:a="http://schemas.openxmlformats.org/drawingml/2006/main">
             <a:pPr algn="l">
               <a:defRPr sz="2700" b="1">
@@ -2922,7 +5174,13 @@
       </p:sp>
       <p:graphicFrame>
         <p:nvGraphicFramePr>
-          <p:cNvPr id="4" name=""/>
+          <p:cNvPr id="2" name="">
+            <a:extLst xmlns:a="http://schemas.openxmlformats.org/drawingml/2006/main">
+              <a:ext uri="{FF2B5EF4-FFF2-40B4-BE49-F238E27FC236}">
+                <a16:creationId xmlns:a16="http://schemas.microsoft.com/office/drawing/2014/main" id="{D2135D75-224B-4437-9443-84E908D2D8E6}"/>
+              </a:ext>
+            </a:extLst>
+          </p:cNvPr>
           <p:cNvGraphicFramePr/>
           <p:nvPr/>
         </p:nvGraphicFramePr>
@@ -2959,6 +5217,30 @@
                     </a:p>
                   </a:txBody>
                   <a:tcPr marL="91440" marR="91440" marT="45720" marB="45720">
+                    <a:lnL w="9525">
+                      <a:solidFill>
+                        <a:srgbClr val="888888"/>
+                      </a:solidFill>
+                      <a:prstDash val="solid"/>
+                    </a:lnL>
+                    <a:lnR w="9525">
+                      <a:solidFill>
+                        <a:srgbClr val="888888"/>
+                      </a:solidFill>
+                      <a:prstDash val="solid"/>
+                    </a:lnR>
+                    <a:lnT w="9525">
+                      <a:solidFill>
+                        <a:srgbClr val="888888"/>
+                      </a:solidFill>
+                      <a:prstDash val="solid"/>
+                    </a:lnT>
+                    <a:lnB w="9525">
+                      <a:solidFill>
+                        <a:srgbClr val="888888"/>
+                      </a:solidFill>
+                      <a:prstDash val="solid"/>
+                    </a:lnB>
                     <a:solidFill>
                       <a:srgbClr val="F1F1F1"/>
                     </a:solidFill>
@@ -2983,6 +5265,24 @@
                     </a:p>
                   </a:txBody>
                   <a:tcPr marL="91440" marR="91440" marT="45720" marB="45720">
+                    <a:lnR w="9525">
+                      <a:solidFill>
+                        <a:srgbClr val="888888"/>
+                      </a:solidFill>
+                      <a:prstDash val="solid"/>
+                    </a:lnR>
+                    <a:lnT w="9525">
+                      <a:solidFill>
+                        <a:srgbClr val="888888"/>
+                      </a:solidFill>
+                      <a:prstDash val="solid"/>
+                    </a:lnT>
+                    <a:lnB w="9525">
+                      <a:solidFill>
+                        <a:srgbClr val="888888"/>
+                      </a:solidFill>
+                      <a:prstDash val="solid"/>
+                    </a:lnB>
                     <a:solidFill>
                       <a:srgbClr val="F1F1F1"/>
                     </a:solidFill>
@@ -3007,6 +5307,24 @@
                     </a:p>
                   </a:txBody>
                   <a:tcPr marL="91440" marR="91440" marT="45720" marB="45720">
+                    <a:lnR w="9525">
+                      <a:solidFill>
+                        <a:srgbClr val="888888"/>
+                      </a:solidFill>
+                      <a:prstDash val="solid"/>
+                    </a:lnR>
+                    <a:lnT w="9525">
+                      <a:solidFill>
+                        <a:srgbClr val="888888"/>
+                      </a:solidFill>
+                      <a:prstDash val="solid"/>
+                    </a:lnT>
+                    <a:lnB w="9525">
+                      <a:solidFill>
+                        <a:srgbClr val="888888"/>
+                      </a:solidFill>
+                      <a:prstDash val="solid"/>
+                    </a:lnB>
                     <a:solidFill>
                       <a:srgbClr val="F1F1F1"/>
                     </a:solidFill>
@@ -3033,6 +5351,24 @@
                     </a:p>
                   </a:txBody>
                   <a:tcPr marL="91440" marR="91440" marT="45720" marB="45720">
+                    <a:lnL w="9525">
+                      <a:solidFill>
+                        <a:srgbClr val="888888"/>
+                      </a:solidFill>
+                      <a:prstDash val="solid"/>
+                    </a:lnL>
+                    <a:lnR w="9525">
+                      <a:solidFill>
+                        <a:srgbClr val="888888"/>
+                      </a:solidFill>
+                      <a:prstDash val="solid"/>
+                    </a:lnR>
+                    <a:lnB w="9525">
+                      <a:solidFill>
+                        <a:srgbClr val="888888"/>
+                      </a:solidFill>
+                      <a:prstDash val="solid"/>
+                    </a:lnB>
                     <a:solidFill>
                       <a:srgbClr val="FFFFFF"/>
                     </a:solidFill>
@@ -3057,6 +5393,18 @@
                     </a:p>
                   </a:txBody>
                   <a:tcPr marL="91440" marR="91440" marT="45720" marB="45720">
+                    <a:lnR w="9525">
+                      <a:solidFill>
+                        <a:srgbClr val="888888"/>
+                      </a:solidFill>
+                      <a:prstDash val="solid"/>
+                    </a:lnR>
+                    <a:lnB w="9525">
+                      <a:solidFill>
+                        <a:srgbClr val="888888"/>
+                      </a:solidFill>
+                      <a:prstDash val="solid"/>
+                    </a:lnB>
                     <a:solidFill>
                       <a:srgbClr val="FFFFFF"/>
                     </a:solidFill>
@@ -3081,6 +5429,18 @@
                     </a:p>
                   </a:txBody>
                   <a:tcPr marL="91440" marR="91440" marT="45720" marB="45720">
+                    <a:lnR w="9525">
+                      <a:solidFill>
+                        <a:srgbClr val="888888"/>
+                      </a:solidFill>
+                      <a:prstDash val="solid"/>
+                    </a:lnR>
+                    <a:lnB w="9525">
+                      <a:solidFill>
+                        <a:srgbClr val="888888"/>
+                      </a:solidFill>
+                      <a:prstDash val="solid"/>
+                    </a:lnB>
                     <a:solidFill>
                       <a:srgbClr val="FFFFFF"/>
                     </a:solidFill>
@@ -3107,6 +5467,24 @@
                     </a:p>
                   </a:txBody>
                   <a:tcPr marL="91440" marR="91440" marT="45720" marB="45720">
+                    <a:lnL w="9525">
+                      <a:solidFill>
+                        <a:srgbClr val="888888"/>
+                      </a:solidFill>
+                      <a:prstDash val="solid"/>
+                    </a:lnL>
+                    <a:lnR w="9525">
+                      <a:solidFill>
+                        <a:srgbClr val="888888"/>
+                      </a:solidFill>
+                      <a:prstDash val="solid"/>
+                    </a:lnR>
+                    <a:lnB w="9525">
+                      <a:solidFill>
+                        <a:srgbClr val="888888"/>
+                      </a:solidFill>
+                      <a:prstDash val="solid"/>
+                    </a:lnB>
                     <a:solidFill>
                       <a:srgbClr val="FFFFFF"/>
                     </a:solidFill>
@@ -3131,6 +5509,18 @@
                     </a:p>
                   </a:txBody>
                   <a:tcPr marL="91440" marR="91440" marT="45720" marB="45720">
+                    <a:lnR w="9525">
+                      <a:solidFill>
+                        <a:srgbClr val="888888"/>
+                      </a:solidFill>
+                      <a:prstDash val="solid"/>
+                    </a:lnR>
+                    <a:lnB w="9525">
+                      <a:solidFill>
+                        <a:srgbClr val="888888"/>
+                      </a:solidFill>
+                      <a:prstDash val="solid"/>
+                    </a:lnB>
                     <a:solidFill>
                       <a:srgbClr val="FFFFFF"/>
                     </a:solidFill>
@@ -3155,6 +5545,18 @@
                     </a:p>
                   </a:txBody>
                   <a:tcPr marL="91440" marR="91440" marT="45720" marB="45720">
+                    <a:lnR w="9525">
+                      <a:solidFill>
+                        <a:srgbClr val="888888"/>
+                      </a:solidFill>
+                      <a:prstDash val="solid"/>
+                    </a:lnR>
+                    <a:lnB w="9525">
+                      <a:solidFill>
+                        <a:srgbClr val="888888"/>
+                      </a:solidFill>
+                      <a:prstDash val="solid"/>
+                    </a:lnB>
                     <a:solidFill>
                       <a:srgbClr val="FFFFFF"/>
                     </a:solidFill>
@@ -3181,6 +5583,24 @@
                     </a:p>
                   </a:txBody>
                   <a:tcPr marL="91440" marR="91440" marT="45720" marB="45720">
+                    <a:lnL w="9525">
+                      <a:solidFill>
+                        <a:srgbClr val="888888"/>
+                      </a:solidFill>
+                      <a:prstDash val="solid"/>
+                    </a:lnL>
+                    <a:lnR w="9525">
+                      <a:solidFill>
+                        <a:srgbClr val="888888"/>
+                      </a:solidFill>
+                      <a:prstDash val="solid"/>
+                    </a:lnR>
+                    <a:lnB w="9525">
+                      <a:solidFill>
+                        <a:srgbClr val="888888"/>
+                      </a:solidFill>
+                      <a:prstDash val="solid"/>
+                    </a:lnB>
                     <a:solidFill>
                       <a:srgbClr val="FFFFFF"/>
                     </a:solidFill>
@@ -3205,6 +5625,18 @@
                     </a:p>
                   </a:txBody>
                   <a:tcPr marL="91440" marR="91440" marT="45720" marB="45720">
+                    <a:lnR w="9525">
+                      <a:solidFill>
+                        <a:srgbClr val="888888"/>
+                      </a:solidFill>
+                      <a:prstDash val="solid"/>
+                    </a:lnR>
+                    <a:lnB w="9525">
+                      <a:solidFill>
+                        <a:srgbClr val="888888"/>
+                      </a:solidFill>
+                      <a:prstDash val="solid"/>
+                    </a:lnB>
                     <a:solidFill>
                       <a:srgbClr val="FFFFFF"/>
                     </a:solidFill>
@@ -3229,6 +5661,18 @@
                     </a:p>
                   </a:txBody>
                   <a:tcPr marL="91440" marR="91440" marT="45720" marB="45720">
+                    <a:lnR w="9525">
+                      <a:solidFill>
+                        <a:srgbClr val="888888"/>
+                      </a:solidFill>
+                      <a:prstDash val="solid"/>
+                    </a:lnR>
+                    <a:lnB w="9525">
+                      <a:solidFill>
+                        <a:srgbClr val="888888"/>
+                      </a:solidFill>
+                      <a:prstDash val="solid"/>
+                    </a:lnB>
                     <a:solidFill>
                       <a:srgbClr val="FFFFFF"/>
                     </a:solidFill>
@@ -3242,7 +5686,7 @@
     </p:spTree>
     <p:extLst>
       <p:ext uri="{BB962C8B-B14F-4D97-AF65-F5344CB8AC3E}">
-        <p14:creationId xmlns:p14="http://schemas.microsoft.com/office/powerpoint/2010/main" val="2093906176"/>
+        <p14:creationId xmlns:p14="http://schemas.microsoft.com/office/powerpoint/2010/main" val="1383836143"/>
       </p:ext>
     </p:extLst>
   </p:cSld>
@@ -3273,7 +5717,7 @@
           <p:cNvPr id="6" name="">
             <a:extLst xmlns:a="http://schemas.openxmlformats.org/drawingml/2006/main">
               <a:ext uri="{FF2B5EF4-FFF2-40B4-BE49-F238E27FC236}">
-                <a16:creationId xmlns:a16="http://schemas.microsoft.com/office/drawing/2014/main" id="{43B5CF81-F8CA-416D-9C41-5306181BC2FD}"/>
+                <a16:creationId xmlns:a16="http://schemas.microsoft.com/office/drawing/2014/main" id="{F02E0AC8-5DC6-4BA9-A6D2-FBF3D7B66CE1}"/>
               </a:ext>
             </a:extLst>
           </p:cNvPr>
@@ -3299,7 +5743,18 @@
           <a:bodyPr xmlns:a="http://schemas.openxmlformats.org/drawingml/2006/main" anchor="ctr">
             <a:noAutofit/>
           </a:bodyPr>
-          <a:lstStyle xmlns:a="http://schemas.openxmlformats.org/drawingml/2006/main"/>
+          <a:lstStyle xmlns:a="http://schemas.openxmlformats.org/drawingml/2006/main">
+            <a:defPPr algn="l">
+              <a:defRPr sz="2700" b="1">
+                <a:solidFill>
+                  <a:srgbClr val="161616"/>
+                </a:solidFill>
+                <a:latin typeface="Arial"/>
+                <a:ea typeface="Arial"/>
+                <a:cs typeface="Arial"/>
+              </a:defRPr>
+            </a:defPPr>
+          </a:lstStyle>
           <a:p xmlns:a="http://schemas.openxmlformats.org/drawingml/2006/main">
             <a:pPr algn="l">
               <a:defRPr sz="2700" b="1">
@@ -3330,7 +5785,7 @@
           <p:cNvPr id="2" name="">
             <a:extLst xmlns:a="http://schemas.openxmlformats.org/drawingml/2006/main">
               <a:ext uri="{FF2B5EF4-FFF2-40B4-BE49-F238E27FC236}">
-                <a16:creationId xmlns:a16="http://schemas.microsoft.com/office/drawing/2014/main" id="{2EA6CAA2-D9B2-45D8-B83B-924786C62DAB}"/>
+                <a16:creationId xmlns:a16="http://schemas.microsoft.com/office/drawing/2014/main" id="{9F839B3D-1ACE-49C5-8363-CF32C38228FA}"/>
               </a:ext>
             </a:extLst>
           </p:cNvPr>
@@ -3356,7 +5811,18 @@
           <a:bodyPr xmlns:a="http://schemas.openxmlformats.org/drawingml/2006/main">
             <a:noAutofit/>
           </a:bodyPr>
-          <a:lstStyle xmlns:a="http://schemas.openxmlformats.org/drawingml/2006/main"/>
+          <a:lstStyle xmlns:a="http://schemas.openxmlformats.org/drawingml/2006/main">
+            <a:defPPr>
+              <a:defRPr sz="2175" b="0">
+                <a:solidFill>
+                  <a:srgbClr val="161616"/>
+                </a:solidFill>
+                <a:latin typeface="Arial"/>
+                <a:ea typeface="Arial"/>
+                <a:cs typeface="Arial"/>
+              </a:defRPr>
+            </a:defPPr>
+          </a:lstStyle>
           <a:p xmlns:a="http://schemas.openxmlformats.org/drawingml/2006/main">
             <a:pPr>
               <a:defRPr sz="2175" b="0">
@@ -3387,7 +5853,7 @@
           <p:cNvPr id="3" name="">
             <a:extLst xmlns:a="http://schemas.openxmlformats.org/drawingml/2006/main">
               <a:ext uri="{FF2B5EF4-FFF2-40B4-BE49-F238E27FC236}">
-                <a16:creationId xmlns:a16="http://schemas.microsoft.com/office/drawing/2014/main" id="{9775E3FD-EF2C-4126-AA7B-6CD6FB67966E}"/>
+                <a16:creationId xmlns:a16="http://schemas.microsoft.com/office/drawing/2014/main" id="{8BE2124C-BB25-45F9-AE7A-8894A27D2664}"/>
               </a:ext>
             </a:extLst>
           </p:cNvPr>
@@ -3413,7 +5879,18 @@
           <a:bodyPr xmlns:a="http://schemas.openxmlformats.org/drawingml/2006/main">
             <a:noAutofit/>
           </a:bodyPr>
-          <a:lstStyle xmlns:a="http://schemas.openxmlformats.org/drawingml/2006/main"/>
+          <a:lstStyle xmlns:a="http://schemas.openxmlformats.org/drawingml/2006/main">
+            <a:defPPr>
+              <a:defRPr sz="2175" b="0">
+                <a:solidFill>
+                  <a:srgbClr val="161616"/>
+                </a:solidFill>
+                <a:latin typeface="Arial"/>
+                <a:ea typeface="Arial"/>
+                <a:cs typeface="Arial"/>
+              </a:defRPr>
+            </a:defPPr>
+          </a:lstStyle>
           <a:p xmlns:a="http://schemas.openxmlformats.org/drawingml/2006/main">
             <a:pPr>
               <a:defRPr sz="2175" b="0">
@@ -3444,7 +5921,7 @@
           <p:cNvPr id="4" name="">
             <a:extLst xmlns:a="http://schemas.openxmlformats.org/drawingml/2006/main">
               <a:ext uri="{FF2B5EF4-FFF2-40B4-BE49-F238E27FC236}">
-                <a16:creationId xmlns:a16="http://schemas.microsoft.com/office/drawing/2014/main" id="{0C8320EC-15BD-421D-9D95-9B3EC917B5E5}"/>
+                <a16:creationId xmlns:a16="http://schemas.microsoft.com/office/drawing/2014/main" id="{AC95E50E-5FA6-4D12-ABD5-05D8CCC25ECD}"/>
               </a:ext>
             </a:extLst>
           </p:cNvPr>
@@ -3470,7 +5947,18 @@
           <a:bodyPr xmlns:a="http://schemas.openxmlformats.org/drawingml/2006/main">
             <a:noAutofit/>
           </a:bodyPr>
-          <a:lstStyle xmlns:a="http://schemas.openxmlformats.org/drawingml/2006/main"/>
+          <a:lstStyle xmlns:a="http://schemas.openxmlformats.org/drawingml/2006/main">
+            <a:defPPr>
+              <a:defRPr sz="2175" b="0">
+                <a:solidFill>
+                  <a:srgbClr val="161616"/>
+                </a:solidFill>
+                <a:latin typeface="Arial"/>
+                <a:ea typeface="Arial"/>
+                <a:cs typeface="Arial"/>
+              </a:defRPr>
+            </a:defPPr>
+          </a:lstStyle>
           <a:p xmlns:a="http://schemas.openxmlformats.org/drawingml/2006/main">
             <a:pPr>
               <a:defRPr sz="2175" b="0">
@@ -3501,7 +5989,7 @@
           <p:cNvPr id="5" name="">
             <a:extLst xmlns:a="http://schemas.openxmlformats.org/drawingml/2006/main">
               <a:ext uri="{FF2B5EF4-FFF2-40B4-BE49-F238E27FC236}">
-                <a16:creationId xmlns:a16="http://schemas.microsoft.com/office/drawing/2014/main" id="{02669FF7-0F7D-484D-A310-53E8A342120D}"/>
+                <a16:creationId xmlns:a16="http://schemas.microsoft.com/office/drawing/2014/main" id="{1622CF58-ABC2-413F-9A16-80F7E189C4CB}"/>
               </a:ext>
             </a:extLst>
           </p:cNvPr>
@@ -3527,7 +6015,18 @@
           <a:bodyPr xmlns:a="http://schemas.openxmlformats.org/drawingml/2006/main">
             <a:noAutofit/>
           </a:bodyPr>
-          <a:lstStyle xmlns:a="http://schemas.openxmlformats.org/drawingml/2006/main"/>
+          <a:lstStyle xmlns:a="http://schemas.openxmlformats.org/drawingml/2006/main">
+            <a:defPPr>
+              <a:defRPr sz="2175" b="0">
+                <a:solidFill>
+                  <a:srgbClr val="161616"/>
+                </a:solidFill>
+                <a:latin typeface="Arial"/>
+                <a:ea typeface="Arial"/>
+                <a:cs typeface="Arial"/>
+              </a:defRPr>
+            </a:defPPr>
+          </a:lstStyle>
           <a:p xmlns:a="http://schemas.openxmlformats.org/drawingml/2006/main">
             <a:pPr>
               <a:defRPr sz="2175" b="0">
@@ -3556,7 +6055,7 @@
     </p:spTree>
     <p:extLst>
       <p:ext uri="{BB962C8B-B14F-4D97-AF65-F5344CB8AC3E}">
-        <p14:creationId xmlns:p14="http://schemas.microsoft.com/office/powerpoint/2010/main" val="1270803327"/>
+        <p14:creationId xmlns:p14="http://schemas.microsoft.com/office/powerpoint/2010/main" val="746271246"/>
       </p:ext>
     </p:extLst>
   </p:cSld>
@@ -3604,16 +6103,16 @@
         <a:srgbClr val="96607D"/>
       </a:folHlink>
     </a:clrScheme>
-    <a:fontScheme name="Office">
+    <a:fontScheme name="">
       <a:majorFont>
-        <a:latin typeface="Calibri Light"/>
-        <a:ea typeface="Calibri Light"/>
-        <a:cs typeface="Calibri Light"/>
+        <a:latin typeface="Aptos"/>
+        <a:ea typeface=""/>
+        <a:cs typeface=""/>
       </a:majorFont>
       <a:minorFont>
-        <a:latin typeface="Calibri"/>
-        <a:ea typeface="Calibri"/>
-        <a:cs typeface="Calibri"/>
+        <a:latin typeface="Aptos"/>
+        <a:ea typeface=""/>
+        <a:cs typeface=""/>
       </a:minorFont>
     </a:fontScheme>
     <a:fmtScheme name="ChatGPT">
